--- a/public/downloads/praesentation/M22.pptx
+++ b/public/downloads/praesentation/M22.pptx
@@ -3289,7 +3289,7 @@
                 </a:solidFill>
                 <a:latin typeface="Georgia"/>
               </a:rPr>
-              <a:t>Strategische Unternehmensanalyse als Kern der Kreditwürdigkeitsbeurteilungrlage</a:t>
+              <a:t>Strategische Unternehmensanalyse als Kern der Kreditwürdigkeitsbeurteilung</a:t>
             </a:r>
           </a:p>
         </p:txBody>
@@ -5929,7 +5929,7 @@
                 </a:solidFill>
                 <a:latin typeface="Courier New"/>
               </a:rPr>
-              <a:t>III · VON DER ANALYSE ZUR ENTSCHEIDUNGSVORLAGE</a:t>
+              <a:t>III · VOM FRAMEWORK ZUM KREDITURTEIL</a:t>
             </a:r>
           </a:p>
         </p:txBody>
@@ -6355,6 +6355,18 @@
               <a:t>Anderson, L. W. &amp; Krathwohl, D. R. (2001). A taxonomy for learning, teaching, and assessing. Longman.</a:t>
             </a:r>
           </a:p>
+          <a:p>
+            <a:pPr algn="l"/>
+            <a:r>
+              <a:rPr sz="1000" b="0" i="0">
+                <a:solidFill>
+                  <a:srgbClr val="F8F8FA"/>
+                </a:solidFill>
+                <a:latin typeface="Courier New"/>
+              </a:rPr>
+              <a:t>Kirkpatrick, D. L. (1994). Evaluating training programs: The four levels. Berrett-Koehler.</a:t>
+            </a:r>
+          </a:p>
         </p:txBody>
       </p:sp>
       <p:sp>
@@ -6429,13 +6441,13 @@
       </p:sp>
       <p:sp>
         <p:nvSpPr>
-          <p:cNvPr id="11" name="TextBox 10"/>
+          <p:cNvPr id="14" name="TextBox 13"/>
           <p:cNvSpPr txBox="1"/>
           <p:nvPr/>
         </p:nvSpPr>
         <p:spPr>
           <a:xfrm>
-            <a:off x="609600" y="3765550"/>
+            <a:off x="609600" y="5213350"/>
             <a:ext cx="5207000" cy="444500"/>
           </a:xfrm>
           <a:prstGeom prst="rect">
@@ -6457,20 +6469,20 @@
                 </a:solidFill>
                 <a:latin typeface="Courier New"/>
               </a:rPr>
-              <a:t>Bundesanstalt für Finanzdienstleistungsaufsicht. (2023). Mindestanforderungen an das Risikomanagement (MaRisk): Rundschreiben 10/2012 (BA)…</a:t>
-            </a:r>
-          </a:p>
-        </p:txBody>
-      </p:sp>
-      <p:sp>
-        <p:nvSpPr>
-          <p:cNvPr id="12" name="TextBox 11"/>
+              <a:t>BVR. (2024). Jahrbuch der deutschen Volksbanken und Raiffeisenbanken 2024. BVR.</a:t>
+            </a:r>
+          </a:p>
+        </p:txBody>
+      </p:sp>
+      <p:sp>
+        <p:nvSpPr>
+          <p:cNvPr id="15" name="TextBox 14"/>
           <p:cNvSpPr txBox="1"/>
           <p:nvPr/>
         </p:nvSpPr>
         <p:spPr>
           <a:xfrm>
-            <a:off x="609600" y="4248150"/>
+            <a:off x="609600" y="5695950"/>
             <a:ext cx="5207000" cy="444500"/>
           </a:xfrm>
           <a:prstGeom prst="rect">
@@ -6492,20 +6504,20 @@
                 </a:solidFill>
                 <a:latin typeface="Courier New"/>
               </a:rPr>
-              <a:t>Bundesministerium der Justiz. (2006). Beleihungswertermittlungsverordnung (BelWertV) vom 12. Mai 2006. BGBl. I, 1335.</a:t>
-            </a:r>
-          </a:p>
-        </p:txBody>
-      </p:sp>
-      <p:sp>
-        <p:nvSpPr>
-          <p:cNvPr id="13" name="TextBox 12"/>
+              <a:t>Dreyfus, S. E. &amp; Dreyfus, H. L. (1980). A five-stage model of the mental activities. UC Berkeley.</a:t>
+            </a:r>
+          </a:p>
+        </p:txBody>
+      </p:sp>
+      <p:sp>
+        <p:nvSpPr>
+          <p:cNvPr id="16" name="TextBox 15"/>
           <p:cNvSpPr txBox="1"/>
           <p:nvPr/>
         </p:nvSpPr>
         <p:spPr>
           <a:xfrm>
-            <a:off x="609600" y="4730750"/>
+            <a:off x="609600" y="6178550"/>
             <a:ext cx="5207000" cy="444500"/>
           </a:xfrm>
           <a:prstGeom prst="rect">
@@ -6527,21 +6539,21 @@
                 </a:solidFill>
                 <a:latin typeface="Courier New"/>
               </a:rPr>
-              <a:t>Dreyfus, H. L., &amp; Dreyfus, S. E. (1980). A five-stage model of the mental activities involved in directed skill acquisition. Operations…</a:t>
-            </a:r>
-          </a:p>
-        </p:txBody>
-      </p:sp>
-      <p:sp>
-        <p:nvSpPr>
-          <p:cNvPr id="14" name="TextBox 13"/>
+              <a:t>Grant, R. M. (2016). Contemporary Strategy Analysis (9. Aufl.). Wiley.</a:t>
+            </a:r>
+          </a:p>
+        </p:txBody>
+      </p:sp>
+      <p:sp>
+        <p:nvSpPr>
+          <p:cNvPr id="17" name="TextBox 16"/>
           <p:cNvSpPr txBox="1"/>
           <p:nvPr/>
         </p:nvSpPr>
         <p:spPr>
           <a:xfrm>
-            <a:off x="609600" y="5213350"/>
-            <a:ext cx="5207000" cy="444500"/>
+            <a:off x="6096000" y="2317750"/>
+            <a:ext cx="5232400" cy="444500"/>
           </a:xfrm>
           <a:prstGeom prst="rect">
             <a:avLst/>
@@ -6562,21 +6574,21 @@
                 </a:solidFill>
                 <a:latin typeface="Courier New"/>
               </a:rPr>
-              <a:t>BVR. (2024). Jahrbuch der deutschen Volksbanken und Raiffeisenbanken 2024. BVR.</a:t>
-            </a:r>
-          </a:p>
-        </p:txBody>
-      </p:sp>
-      <p:sp>
-        <p:nvSpPr>
-          <p:cNvPr id="15" name="TextBox 14"/>
+              <a:t>Macharzina, K. &amp; Wolf, J. (2018). Unternehmensführung (9. Aufl.). Springer Gabler.</a:t>
+            </a:r>
+          </a:p>
+        </p:txBody>
+      </p:sp>
+      <p:sp>
+        <p:nvSpPr>
+          <p:cNvPr id="18" name="TextBox 17"/>
           <p:cNvSpPr txBox="1"/>
           <p:nvPr/>
         </p:nvSpPr>
         <p:spPr>
           <a:xfrm>
-            <a:off x="609600" y="5695950"/>
-            <a:ext cx="5207000" cy="444500"/>
+            <a:off x="6096000" y="2800350"/>
+            <a:ext cx="5232400" cy="444500"/>
           </a:xfrm>
           <a:prstGeom prst="rect">
             <a:avLst/>
@@ -6597,21 +6609,21 @@
                 </a:solidFill>
                 <a:latin typeface="Courier New"/>
               </a:rPr>
-              <a:t>Dreyfus, S. E. &amp; Dreyfus, H. L. (1980). A five-stage model of the mental activities. UC Berkeley.</a:t>
-            </a:r>
-          </a:p>
-        </p:txBody>
-      </p:sp>
-      <p:sp>
-        <p:nvSpPr>
-          <p:cNvPr id="16" name="TextBox 15"/>
+              <a:t>Osterwalder, A. &amp; Pigneur, Y. (2010). Business Model Generation. Wiley.</a:t>
+            </a:r>
+          </a:p>
+        </p:txBody>
+      </p:sp>
+      <p:sp>
+        <p:nvSpPr>
+          <p:cNvPr id="19" name="TextBox 18"/>
           <p:cNvSpPr txBox="1"/>
           <p:nvPr/>
         </p:nvSpPr>
         <p:spPr>
           <a:xfrm>
-            <a:off x="609600" y="6178550"/>
-            <a:ext cx="5207000" cy="444500"/>
+            <a:off x="6096000" y="3282950"/>
+            <a:ext cx="5232400" cy="444500"/>
           </a:xfrm>
           <a:prstGeom prst="rect">
             <a:avLst/>
@@ -6632,20 +6644,20 @@
                 </a:solidFill>
                 <a:latin typeface="Courier New"/>
               </a:rPr>
-              <a:t>Grant, R. M. (2016). Contemporary Strategy Analysis (9. Aufl.). Wiley.</a:t>
-            </a:r>
-          </a:p>
-        </p:txBody>
-      </p:sp>
-      <p:sp>
-        <p:nvSpPr>
-          <p:cNvPr id="17" name="TextBox 16"/>
+              <a:t>Porter, M. E. (1979). How competitive forces shape strategy. Harvard Business Review, 57(2), 137–145.</a:t>
+            </a:r>
+          </a:p>
+        </p:txBody>
+      </p:sp>
+      <p:sp>
+        <p:nvSpPr>
+          <p:cNvPr id="20" name="TextBox 19"/>
           <p:cNvSpPr txBox="1"/>
           <p:nvPr/>
         </p:nvSpPr>
         <p:spPr>
           <a:xfrm>
-            <a:off x="6096000" y="2317750"/>
+            <a:off x="6096000" y="3765550"/>
             <a:ext cx="5232400" cy="444500"/>
           </a:xfrm>
           <a:prstGeom prst="rect">
@@ -6667,20 +6679,20 @@
                 </a:solidFill>
                 <a:latin typeface="Courier New"/>
               </a:rPr>
-              <a:t>Macharzina, K. &amp; Wolf, J. (2018). Unternehmensführung (9. Aufl.). Springer Gabler.</a:t>
-            </a:r>
-          </a:p>
-        </p:txBody>
-      </p:sp>
-      <p:sp>
-        <p:nvSpPr>
-          <p:cNvPr id="18" name="TextBox 17"/>
+              <a:t>Porter, M. E. (1980). Competitive Strategy: Techniques for Analyzing Industries. Free Press.</a:t>
+            </a:r>
+          </a:p>
+        </p:txBody>
+      </p:sp>
+      <p:sp>
+        <p:nvSpPr>
+          <p:cNvPr id="21" name="TextBox 20"/>
           <p:cNvSpPr txBox="1"/>
           <p:nvPr/>
         </p:nvSpPr>
         <p:spPr>
           <a:xfrm>
-            <a:off x="6096000" y="2800350"/>
+            <a:off x="6096000" y="4248150"/>
             <a:ext cx="5232400" cy="444500"/>
           </a:xfrm>
           <a:prstGeom prst="rect">
@@ -6702,20 +6714,20 @@
                 </a:solidFill>
                 <a:latin typeface="Courier New"/>
               </a:rPr>
-              <a:t>Osterwalder, A. &amp; Pigneur, Y. (2010). Business Model Generation. Wiley.</a:t>
-            </a:r>
-          </a:p>
-        </p:txBody>
-      </p:sp>
-      <p:sp>
-        <p:nvSpPr>
-          <p:cNvPr id="19" name="TextBox 18"/>
+              <a:t>Welge, M. K. &amp; Al-Laham, A. (2012). Strategisches Management (6. Aufl.). Springer Gabler.</a:t>
+            </a:r>
+          </a:p>
+        </p:txBody>
+      </p:sp>
+      <p:sp>
+        <p:nvSpPr>
+          <p:cNvPr id="22" name="TextBox 21"/>
           <p:cNvSpPr txBox="1"/>
           <p:nvPr/>
         </p:nvSpPr>
         <p:spPr>
           <a:xfrm>
-            <a:off x="6096000" y="3282950"/>
+            <a:off x="6096000" y="4730750"/>
             <a:ext cx="5232400" cy="444500"/>
           </a:xfrm>
           <a:prstGeom prst="rect">
@@ -6737,147 +6749,7 @@
                 </a:solidFill>
                 <a:latin typeface="Courier New"/>
               </a:rPr>
-              <a:t>Porter, M. E. (1979). How competitive forces shape strategy. Harvard Business Review, 57(2), 137–145.</a:t>
-            </a:r>
-          </a:p>
-        </p:txBody>
-      </p:sp>
-      <p:sp>
-        <p:nvSpPr>
-          <p:cNvPr id="20" name="TextBox 19"/>
-          <p:cNvSpPr txBox="1"/>
-          <p:nvPr/>
-        </p:nvSpPr>
-        <p:spPr>
-          <a:xfrm>
-            <a:off x="6096000" y="3765550"/>
-            <a:ext cx="5232400" cy="444500"/>
-          </a:xfrm>
-          <a:prstGeom prst="rect">
-            <a:avLst/>
-          </a:prstGeom>
-          <a:noFill/>
-        </p:spPr>
-        <p:txBody>
-          <a:bodyPr wrap="square">
-            <a:normAutofit/>
-          </a:bodyPr>
-          <a:lstStyle/>
-          <a:p>
-            <a:pPr algn="l"/>
-            <a:r>
-              <a:rPr sz="1000" b="0" i="0">
-                <a:solidFill>
-                  <a:srgbClr val="F8F8FA"/>
-                </a:solidFill>
-                <a:latin typeface="Courier New"/>
-              </a:rPr>
-              <a:t>Porter, M. E. (1980). Competitive Strategy: Techniques for Analyzing Industries. Free Press.</a:t>
-            </a:r>
-          </a:p>
-        </p:txBody>
-      </p:sp>
-      <p:sp>
-        <p:nvSpPr>
-          <p:cNvPr id="21" name="TextBox 20"/>
-          <p:cNvSpPr txBox="1"/>
-          <p:nvPr/>
-        </p:nvSpPr>
-        <p:spPr>
-          <a:xfrm>
-            <a:off x="6096000" y="4248150"/>
-            <a:ext cx="5232400" cy="444500"/>
-          </a:xfrm>
-          <a:prstGeom prst="rect">
-            <a:avLst/>
-          </a:prstGeom>
-          <a:noFill/>
-        </p:spPr>
-        <p:txBody>
-          <a:bodyPr wrap="square">
-            <a:normAutofit/>
-          </a:bodyPr>
-          <a:lstStyle/>
-          <a:p>
-            <a:pPr algn="l"/>
-            <a:r>
-              <a:rPr sz="1000" b="0" i="0">
-                <a:solidFill>
-                  <a:srgbClr val="F8F8FA"/>
-                </a:solidFill>
-                <a:latin typeface="Courier New"/>
-              </a:rPr>
-              <a:t>Welge, M. K. &amp; Al-Laham, A. (2012). Strategisches Management (6. Aufl.). Springer Gabler.</a:t>
-            </a:r>
-          </a:p>
-        </p:txBody>
-      </p:sp>
-      <p:sp>
-        <p:nvSpPr>
-          <p:cNvPr id="22" name="TextBox 21"/>
-          <p:cNvSpPr txBox="1"/>
-          <p:nvPr/>
-        </p:nvSpPr>
-        <p:spPr>
-          <a:xfrm>
-            <a:off x="6096000" y="4730750"/>
-            <a:ext cx="5232400" cy="444500"/>
-          </a:xfrm>
-          <a:prstGeom prst="rect">
-            <a:avLst/>
-          </a:prstGeom>
-          <a:noFill/>
-        </p:spPr>
-        <p:txBody>
-          <a:bodyPr wrap="square">
-            <a:normAutofit/>
-          </a:bodyPr>
-          <a:lstStyle/>
-          <a:p>
-            <a:pPr algn="l"/>
-            <a:r>
-              <a:rPr sz="1000" b="0" i="0">
-                <a:solidFill>
-                  <a:srgbClr val="F8F8FA"/>
-                </a:solidFill>
-                <a:latin typeface="Courier New"/>
-              </a:rPr>
               <a:t>Wernerfelt, B. (1984). A resource-based view of the firm. Strategic Management Journal, 5(2), 171–180.</a:t>
-            </a:r>
-          </a:p>
-        </p:txBody>
-      </p:sp>
-      <p:sp>
-        <p:nvSpPr>
-          <p:cNvPr id="23" name="TextBox 22"/>
-          <p:cNvSpPr txBox="1"/>
-          <p:nvPr/>
-        </p:nvSpPr>
-        <p:spPr>
-          <a:xfrm>
-            <a:off x="6096000" y="5213350"/>
-            <a:ext cx="5232400" cy="444500"/>
-          </a:xfrm>
-          <a:prstGeom prst="rect">
-            <a:avLst/>
-          </a:prstGeom>
-          <a:noFill/>
-        </p:spPr>
-        <p:txBody>
-          <a:bodyPr wrap="square">
-            <a:normAutofit/>
-          </a:bodyPr>
-          <a:lstStyle/>
-          <a:p>
-            <a:pPr algn="l"/>
-            <a:r>
-              <a:rPr sz="1000" b="0" i="0">
-                <a:solidFill>
-                  <a:srgbClr val="F8F8FA"/>
-                </a:solidFill>
-                <a:latin typeface="Courier New"/>
-              </a:rPr>
-              <a:t>zeb. (2022). KMU-Lending Report: Herausforderungen und Chancen im deutschen Mittelstandskreditgeschäft. zeb/rolfes.schierenbeck.associates.</a:t>
             </a:r>
           </a:p>
         </p:txBody>
@@ -7366,7 +7238,7 @@
                 </a:solidFill>
                 <a:latin typeface="Courier New"/>
               </a:rPr>
-              <a:t>002</a:t>
+              <a:t>02</a:t>
             </a:r>
           </a:p>
         </p:txBody>
@@ -7897,6 +7769,146 @@
                 <a:latin typeface="Georgia"/>
               </a:rPr>
               <a:t>Porters generische Wettbewerbsstrategien identifizieren und das Stuck-in-the-Middle-Risiko eines KMU beurteilen (Bloom 4)</a:t>
+            </a:r>
+          </a:p>
+        </p:txBody>
+      </p:sp>
+      <p:sp>
+        <p:nvSpPr>
+          <p:cNvPr id="17" name="TextBox 16"/>
+          <p:cNvSpPr txBox="1"/>
+          <p:nvPr/>
+        </p:nvSpPr>
+        <p:spPr>
+          <a:xfrm>
+            <a:off x="4064000" y="3733000"/>
+            <a:ext cx="762000" cy="647700"/>
+          </a:xfrm>
+          <a:prstGeom prst="rect">
+            <a:avLst/>
+          </a:prstGeom>
+          <a:noFill/>
+        </p:spPr>
+        <p:txBody>
+          <a:bodyPr wrap="none">
+            <a:normAutofit/>
+          </a:bodyPr>
+          <a:lstStyle/>
+          <a:p>
+            <a:pPr algn="l"/>
+            <a:r>
+              <a:rPr sz="2400" b="0" i="1">
+                <a:solidFill>
+                  <a:srgbClr val="1F2B56"/>
+                </a:solidFill>
+                <a:latin typeface="Georgia"/>
+              </a:rPr>
+              <a:t>V</a:t>
+            </a:r>
+          </a:p>
+        </p:txBody>
+      </p:sp>
+      <p:sp>
+        <p:nvSpPr>
+          <p:cNvPr id="18" name="TextBox 17"/>
+          <p:cNvSpPr txBox="1"/>
+          <p:nvPr/>
+        </p:nvSpPr>
+        <p:spPr>
+          <a:xfrm>
+            <a:off x="4953000" y="3745700"/>
+            <a:ext cx="6629400" cy="635000"/>
+          </a:xfrm>
+          <a:prstGeom prst="rect">
+            <a:avLst/>
+          </a:prstGeom>
+          <a:noFill/>
+        </p:spPr>
+        <p:txBody>
+          <a:bodyPr wrap="square">
+            <a:normAutofit/>
+          </a:bodyPr>
+          <a:lstStyle/>
+          <a:p>
+            <a:pPr algn="l"/>
+            <a:r>
+              <a:rPr sz="1400" b="0" i="0">
+                <a:solidFill>
+                  <a:srgbClr val="191D2E"/>
+                </a:solidFill>
+                <a:latin typeface="Georgia"/>
+              </a:rPr>
+              <a:t>Die strategische Position eines Unternehmens hinsichtlich seiner mittelfristigen Kreditwürdigkeit beurteilen (Bloom 5)</a:t>
+            </a:r>
+          </a:p>
+        </p:txBody>
+      </p:sp>
+      <p:sp>
+        <p:nvSpPr>
+          <p:cNvPr id="17" name="TextBox 16"/>
+          <p:cNvSpPr txBox="1"/>
+          <p:nvPr/>
+        </p:nvSpPr>
+        <p:spPr>
+          <a:xfrm>
+            <a:off x="4064000" y="4430700"/>
+            <a:ext cx="762000" cy="647700"/>
+          </a:xfrm>
+          <a:prstGeom prst="rect">
+            <a:avLst/>
+          </a:prstGeom>
+          <a:noFill/>
+        </p:spPr>
+        <p:txBody>
+          <a:bodyPr wrap="none">
+            <a:normAutofit/>
+          </a:bodyPr>
+          <a:lstStyle/>
+          <a:p>
+            <a:pPr algn="l"/>
+            <a:r>
+              <a:rPr sz="2400" b="0" i="1">
+                <a:solidFill>
+                  <a:srgbClr val="1F2B56"/>
+                </a:solidFill>
+                <a:latin typeface="Georgia"/>
+              </a:rPr>
+              <a:t>VI</a:t>
+            </a:r>
+          </a:p>
+        </p:txBody>
+      </p:sp>
+      <p:sp>
+        <p:nvSpPr>
+          <p:cNvPr id="18" name="TextBox 17"/>
+          <p:cNvSpPr txBox="1"/>
+          <p:nvPr/>
+        </p:nvSpPr>
+        <p:spPr>
+          <a:xfrm>
+            <a:off x="4953000" y="4443400"/>
+            <a:ext cx="6629400" cy="635000"/>
+          </a:xfrm>
+          <a:prstGeom prst="rect">
+            <a:avLst/>
+          </a:prstGeom>
+          <a:noFill/>
+        </p:spPr>
+        <p:txBody>
+          <a:bodyPr wrap="square">
+            <a:normAutofit/>
+          </a:bodyPr>
+          <a:lstStyle/>
+          <a:p>
+            <a:pPr algn="l"/>
+            <a:r>
+              <a:rPr sz="1400" b="0" i="0">
+                <a:solidFill>
+                  <a:srgbClr val="191D2E"/>
+                </a:solidFill>
+                <a:latin typeface="Georgia"/>
+              </a:rPr>
+              <a:t>Qualitative Befunde strukturiert in einer Kreditvorlage formulieren (Bloom 5)</a:t>
             </a:r>
           </a:p>
         </p:txBody>
@@ -8031,7 +8043,7 @@
                 </a:solidFill>
                 <a:latin typeface="Courier New"/>
               </a:rPr>
-              <a:t>003</a:t>
+              <a:t>03</a:t>
             </a:r>
           </a:p>
         </p:txBody>
@@ -8136,7 +8148,7 @@
                 </a:solidFill>
                 <a:latin typeface="Georgia"/>
               </a:rPr>
-              <a:t>Three Levels — ein strukturierter Blick auf das Geschäftsmodell</a:t>
+              <a:t>Das Drei-Ebenen-Modell als qualitative Analyseplattform</a:t>
             </a:r>
           </a:p>
         </p:txBody>
@@ -8271,7 +8283,7 @@
                 </a:solidFill>
                 <a:latin typeface="Courier New"/>
               </a:rPr>
-              <a:t>004</a:t>
+              <a:t>04</a:t>
             </a:r>
           </a:p>
         </p:txBody>
@@ -8683,7 +8695,7 @@
                 </a:solidFill>
                 <a:latin typeface="Courier New"/>
               </a:rPr>
-              <a:t>005</a:t>
+              <a:t>05</a:t>
             </a:r>
           </a:p>
         </p:txBody>
@@ -8923,7 +8935,7 @@
                 </a:solidFill>
                 <a:latin typeface="Courier New"/>
               </a:rPr>
-              <a:t>006</a:t>
+              <a:t>06</a:t>
             </a:r>
           </a:p>
         </p:txBody>
@@ -9036,7 +9048,7 @@
                 </a:solidFill>
                 <a:latin typeface="Georgia"/>
               </a:rPr>
-              <a:t>Fünf Kräfte + drei Strategien + eine Falle Frage</a:t>
+              <a:t>Fünf Kräfte + drei Strategien + eine Falle</a:t>
             </a:r>
           </a:p>
         </p:txBody>
@@ -9319,7 +9331,7 @@
                 </a:solidFill>
                 <a:latin typeface="Courier New"/>
               </a:rPr>
-              <a:t>007</a:t>
+              <a:t>07</a:t>
             </a:r>
           </a:p>
         </p:txBody>
@@ -9559,7 +9571,7 @@
                 </a:solidFill>
                 <a:latin typeface="Courier New"/>
               </a:rPr>
-              <a:t>008</a:t>
+              <a:t>08</a:t>
             </a:r>
           </a:p>
         </p:txBody>
@@ -9933,7 +9945,7 @@
                 </a:solidFill>
                 <a:latin typeface="Courier New"/>
               </a:rPr>
-              <a:t>009</a:t>
+              <a:t>09</a:t>
             </a:r>
           </a:p>
         </p:txBody>
@@ -10011,7 +10023,7 @@
                 </a:solidFill>
                 <a:latin typeface="Georgia"/>
               </a:rPr>
-              <a:t>Frameworks → Unternehmersprache: Kein Jargon im Kundengesprächidet</a:t>
+              <a:t>Frameworks → Unternehmersprache: Kein Jargon im Kundengespräch</a:t>
             </a:r>
           </a:p>
         </p:txBody>

--- a/public/downloads/praesentation/M22.pptx
+++ b/public/downloads/praesentation/M22.pptx
@@ -3106,7 +3106,7 @@
       </p:nvGrpSpPr>
       <p:grpSpPr/>
       <p:nvGrpSpPr>
-        <p:cNvPr id="1" name=""/>
+        <p:cNvPr id="11" name=""/>
         <p:cNvGrpSpPr/>
         <p:nvPr/>
       </p:nvGrpSpPr>
@@ -3459,7 +3459,7 @@
       </p:nvGrpSpPr>
       <p:grpSpPr/>
       <p:nvGrpSpPr>
-        <p:cNvPr id="1" name=""/>
+        <p:cNvPr id="64" name=""/>
         <p:cNvGrpSpPr/>
         <p:nvPr/>
       </p:nvGrpSpPr>
@@ -6099,7 +6099,7 @@
       </p:nvGrpSpPr>
       <p:grpSpPr/>
       <p:nvGrpSpPr>
-        <p:cNvPr id="1" name=""/>
+        <p:cNvPr id="23" name=""/>
         <p:cNvGrpSpPr/>
         <p:nvPr/>
       </p:nvGrpSpPr>
@@ -6779,7 +6779,7 @@
       </p:nvGrpSpPr>
       <p:grpSpPr/>
       <p:nvGrpSpPr>
-        <p:cNvPr id="1" name=""/>
+        <p:cNvPr id="11" name=""/>
         <p:cNvGrpSpPr/>
         <p:nvPr/>
       </p:nvGrpSpPr>
@@ -7133,7 +7133,7 @@
       </p:nvGrpSpPr>
       <p:grpSpPr/>
       <p:nvGrpSpPr>
-        <p:cNvPr id="1" name=""/>
+        <p:cNvPr id="19" name=""/>
         <p:cNvGrpSpPr/>
         <p:nvPr/>
       </p:nvGrpSpPr>
@@ -7775,7 +7775,7 @@
       </p:sp>
       <p:sp>
         <p:nvSpPr>
-          <p:cNvPr id="17" name="TextBox 16"/>
+          <p:cNvPr id="20" name="TextBox 16"/>
           <p:cNvSpPr txBox="1"/>
           <p:nvPr/>
         </p:nvSpPr>
@@ -7810,7 +7810,7 @@
       </p:sp>
       <p:sp>
         <p:nvSpPr>
-          <p:cNvPr id="18" name="TextBox 17"/>
+          <p:cNvPr id="22" name="TextBox 17"/>
           <p:cNvSpPr txBox="1"/>
           <p:nvPr/>
         </p:nvSpPr>
@@ -7845,7 +7845,7 @@
       </p:sp>
       <p:sp>
         <p:nvSpPr>
-          <p:cNvPr id="17" name="TextBox 16"/>
+          <p:cNvPr id="21" name="TextBox 16"/>
           <p:cNvSpPr txBox="1"/>
           <p:nvPr/>
         </p:nvSpPr>
@@ -7880,7 +7880,7 @@
       </p:sp>
       <p:sp>
         <p:nvSpPr>
-          <p:cNvPr id="18" name="TextBox 17"/>
+          <p:cNvPr id="23" name="TextBox 17"/>
           <p:cNvSpPr txBox="1"/>
           <p:nvPr/>
         </p:nvSpPr>
@@ -7938,7 +7938,7 @@
       </p:nvGrpSpPr>
       <p:grpSpPr/>
       <p:nvGrpSpPr>
-        <p:cNvPr id="1" name=""/>
+        <p:cNvPr id="8" name=""/>
         <p:cNvGrpSpPr/>
         <p:nvPr/>
       </p:nvGrpSpPr>
@@ -8178,7 +8178,7 @@
       </p:nvGrpSpPr>
       <p:grpSpPr/>
       <p:nvGrpSpPr>
-        <p:cNvPr id="1" name=""/>
+        <p:cNvPr id="9" name=""/>
         <p:cNvGrpSpPr/>
         <p:nvPr/>
       </p:nvGrpSpPr>
@@ -8590,7 +8590,7 @@
       </p:nvGrpSpPr>
       <p:grpSpPr/>
       <p:nvGrpSpPr>
-        <p:cNvPr id="1" name=""/>
+        <p:cNvPr id="8" name=""/>
         <p:cNvGrpSpPr/>
         <p:nvPr/>
       </p:nvGrpSpPr>
@@ -8830,7 +8830,7 @@
       </p:nvGrpSpPr>
       <p:grpSpPr/>
       <p:nvGrpSpPr>
-        <p:cNvPr id="1" name=""/>
+        <p:cNvPr id="12" name=""/>
         <p:cNvGrpSpPr/>
         <p:nvPr/>
       </p:nvGrpSpPr>
@@ -9226,7 +9226,7 @@
       </p:nvGrpSpPr>
       <p:grpSpPr/>
       <p:nvGrpSpPr>
-        <p:cNvPr id="1" name=""/>
+        <p:cNvPr id="8" name=""/>
         <p:cNvGrpSpPr/>
         <p:nvPr/>
       </p:nvGrpSpPr>
@@ -9466,7 +9466,7 @@
       </p:nvGrpSpPr>
       <p:grpSpPr/>
       <p:nvGrpSpPr>
-        <p:cNvPr id="1" name=""/>
+        <p:cNvPr id="9" name=""/>
         <p:cNvGrpSpPr/>
         <p:nvPr/>
       </p:nvGrpSpPr>
@@ -9840,7 +9840,7 @@
       </p:nvGrpSpPr>
       <p:grpSpPr/>
       <p:nvGrpSpPr>
-        <p:cNvPr id="1" name=""/>
+        <p:cNvPr id="9" name=""/>
         <p:cNvGrpSpPr/>
         <p:nvPr/>
       </p:nvGrpSpPr>

--- a/public/downloads/praesentation/M22.pptx
+++ b/public/downloads/praesentation/M22.pptx
@@ -3106,7 +3106,7 @@
       </p:nvGrpSpPr>
       <p:grpSpPr/>
       <p:nvGrpSpPr>
-        <p:cNvPr id="11" name=""/>
+        <p:cNvPr id="11" name="Shape_dup_11_1"/>
         <p:cNvGrpSpPr/>
         <p:nvPr/>
       </p:nvGrpSpPr>
@@ -3459,7 +3459,7 @@
       </p:nvGrpSpPr>
       <p:grpSpPr/>
       <p:nvGrpSpPr>
-        <p:cNvPr id="64" name=""/>
+        <p:cNvPr id="64" name="Shape_dup_64_1"/>
         <p:cNvGrpSpPr/>
         <p:nvPr/>
       </p:nvGrpSpPr>
@@ -6099,7 +6099,7 @@
       </p:nvGrpSpPr>
       <p:grpSpPr/>
       <p:nvGrpSpPr>
-        <p:cNvPr id="23" name=""/>
+        <p:cNvPr id="23" name="Shape_dup_23_1"/>
         <p:cNvGrpSpPr/>
         <p:nvPr/>
       </p:nvGrpSpPr>
@@ -6779,7 +6779,7 @@
       </p:nvGrpSpPr>
       <p:grpSpPr/>
       <p:nvGrpSpPr>
-        <p:cNvPr id="11" name=""/>
+        <p:cNvPr id="11" name="Shape_dup_11_1"/>
         <p:cNvGrpSpPr/>
         <p:nvPr/>
       </p:nvGrpSpPr>
@@ -7133,7 +7133,7 @@
       </p:nvGrpSpPr>
       <p:grpSpPr/>
       <p:nvGrpSpPr>
-        <p:cNvPr id="19" name=""/>
+        <p:cNvPr id="19" name="Shape_dup_19_1"/>
         <p:cNvGrpSpPr/>
         <p:nvPr/>
       </p:nvGrpSpPr>
@@ -7775,7 +7775,7 @@
       </p:sp>
       <p:sp>
         <p:nvSpPr>
-          <p:cNvPr id="20" name="TextBox 16"/>
+          <p:cNvPr id="20" name="TextBox 16_dup1"/>
           <p:cNvSpPr txBox="1"/>
           <p:nvPr/>
         </p:nvSpPr>
@@ -7810,7 +7810,7 @@
       </p:sp>
       <p:sp>
         <p:nvSpPr>
-          <p:cNvPr id="22" name="TextBox 17"/>
+          <p:cNvPr id="22" name="TextBox 17_dup1"/>
           <p:cNvSpPr txBox="1"/>
           <p:nvPr/>
         </p:nvSpPr>
@@ -7845,7 +7845,7 @@
       </p:sp>
       <p:sp>
         <p:nvSpPr>
-          <p:cNvPr id="21" name="TextBox 16"/>
+          <p:cNvPr id="21" name="TextBox 16_dup2"/>
           <p:cNvSpPr txBox="1"/>
           <p:nvPr/>
         </p:nvSpPr>
@@ -7880,7 +7880,7 @@
       </p:sp>
       <p:sp>
         <p:nvSpPr>
-          <p:cNvPr id="23" name="TextBox 17"/>
+          <p:cNvPr id="23" name="TextBox 17_dup2"/>
           <p:cNvSpPr txBox="1"/>
           <p:nvPr/>
         </p:nvSpPr>
@@ -7938,7 +7938,7 @@
       </p:nvGrpSpPr>
       <p:grpSpPr/>
       <p:nvGrpSpPr>
-        <p:cNvPr id="8" name=""/>
+        <p:cNvPr id="8" name="Shape_dup_8_1"/>
         <p:cNvGrpSpPr/>
         <p:nvPr/>
       </p:nvGrpSpPr>
@@ -8178,7 +8178,7 @@
       </p:nvGrpSpPr>
       <p:grpSpPr/>
       <p:nvGrpSpPr>
-        <p:cNvPr id="9" name=""/>
+        <p:cNvPr id="9" name="Shape_dup_9_1"/>
         <p:cNvGrpSpPr/>
         <p:nvPr/>
       </p:nvGrpSpPr>
@@ -8590,7 +8590,7 @@
       </p:nvGrpSpPr>
       <p:grpSpPr/>
       <p:nvGrpSpPr>
-        <p:cNvPr id="8" name=""/>
+        <p:cNvPr id="8" name="Shape_dup_8_1"/>
         <p:cNvGrpSpPr/>
         <p:nvPr/>
       </p:nvGrpSpPr>
@@ -8830,7 +8830,7 @@
       </p:nvGrpSpPr>
       <p:grpSpPr/>
       <p:nvGrpSpPr>
-        <p:cNvPr id="12" name=""/>
+        <p:cNvPr id="12" name="Shape_dup_12_1"/>
         <p:cNvGrpSpPr/>
         <p:nvPr/>
       </p:nvGrpSpPr>
@@ -9226,7 +9226,7 @@
       </p:nvGrpSpPr>
       <p:grpSpPr/>
       <p:nvGrpSpPr>
-        <p:cNvPr id="8" name=""/>
+        <p:cNvPr id="8" name="Shape_dup_8_1"/>
         <p:cNvGrpSpPr/>
         <p:nvPr/>
       </p:nvGrpSpPr>
@@ -9466,7 +9466,7 @@
       </p:nvGrpSpPr>
       <p:grpSpPr/>
       <p:nvGrpSpPr>
-        <p:cNvPr id="9" name=""/>
+        <p:cNvPr id="9" name="Shape_dup_9_1"/>
         <p:cNvGrpSpPr/>
         <p:nvPr/>
       </p:nvGrpSpPr>
@@ -9840,7 +9840,7 @@
       </p:nvGrpSpPr>
       <p:grpSpPr/>
       <p:nvGrpSpPr>
-        <p:cNvPr id="9" name=""/>
+        <p:cNvPr id="9" name="Shape_dup_9_1"/>
         <p:cNvGrpSpPr/>
         <p:nvPr/>
       </p:nvGrpSpPr>

--- a/public/downloads/praesentation/M22.pptx
+++ b/public/downloads/praesentation/M22.pptx
@@ -3094,7 +3094,9 @@
   <p:cSld>
     <p:bg>
       <p:bgPr>
-        <a:noFill/>
+        <a:solidFill>
+          <a:srgbClr val="F8F8FA"/>
+        </a:solidFill>
         <a:effectLst/>
       </p:bgPr>
     </p:bg>
@@ -3105,12 +3107,6 @@
         <p:nvPr/>
       </p:nvGrpSpPr>
       <p:grpSpPr/>
-      <p:nvGrpSpPr>
-        <p:cNvPr id="11" name="Shape_dup_11_1"/>
-        <p:cNvGrpSpPr/>
-        <p:nvPr/>
-      </p:nvGrpSpPr>
-      <p:grpSpPr/>
       <p:sp>
         <p:nvSpPr>
           <p:cNvPr id="2" name="TextBox 1"/>
@@ -3176,7 +3172,7 @@
                 </a:solidFill>
                 <a:latin typeface="Courier New"/>
               </a:rPr>
-              <a:t>M22  ·  v0.2</a:t>
+              <a:t>M21  ·  v0.3</a:t>
             </a:r>
           </a:p>
         </p:txBody>
@@ -3211,7 +3207,7 @@
                 </a:solidFill>
                 <a:latin typeface="Georgia"/>
               </a:rPr>
-              <a:t>Geschäftsmodell &amp; Strategie bewerten</a:t>
+              <a:t>Kreditentscheidung treffen</a:t>
             </a:r>
           </a:p>
         </p:txBody>
@@ -3289,7 +3285,7 @@
                 </a:solidFill>
                 <a:latin typeface="Georgia"/>
               </a:rPr>
-              <a:t>Strategische Unternehmensanalyse als Kern der Kreditwürdigkeitsbeurteilung</a:t>
+              <a:t>Strukturierte Kreditanalyse und überzeugende Entscheidungsvorlage</a:t>
             </a:r>
           </a:p>
         </p:txBody>
@@ -3429,7 +3425,7 @@
                 </a:solidFill>
                 <a:latin typeface="Georgia"/>
               </a:rPr>
-              <a:t>120 Minuten</a:t>
+              <a:t>Halbtag (4 Stunden)</a:t>
             </a:r>
           </a:p>
         </p:txBody>
@@ -3447,7 +3443,9 @@
   <p:cSld>
     <p:bg>
       <p:bgPr>
-        <a:noFill/>
+        <a:solidFill>
+          <a:srgbClr val="F8F8FA"/>
+        </a:solidFill>
         <a:effectLst/>
       </p:bgPr>
     </p:bg>
@@ -3458,12 +3456,6 @@
         <p:nvPr/>
       </p:nvGrpSpPr>
       <p:grpSpPr/>
-      <p:nvGrpSpPr>
-        <p:cNvPr id="64" name="Shape_dup_64_1"/>
-        <p:cNvGrpSpPr/>
-        <p:nvPr/>
-      </p:nvGrpSpPr>
-      <p:grpSpPr/>
       <p:sp>
         <p:nvSpPr>
           <p:cNvPr id="2" name="Rectangle 1"/>
@@ -5929,7 +5921,7 @@
                 </a:solidFill>
                 <a:latin typeface="Courier New"/>
               </a:rPr>
-              <a:t>III · VOM FRAMEWORK ZUM KREDITURTEIL</a:t>
+              <a:t>III · VON DER ANALYSE ZUR ENTSCHEIDUNGSVORLAGE</a:t>
             </a:r>
           </a:p>
         </p:txBody>
@@ -6034,7 +6026,7 @@
                 </a:solidFill>
                 <a:latin typeface="Georgia"/>
               </a:rPr>
-              <a:t>Präzisionswerk Haller GmbH, Ravensburg — Betriebsmittelkredit 800 TEUR</a:t>
+              <a:t>Metallbau Schnell GmbH, Heilbronn — Kreditentscheidung</a:t>
             </a:r>
           </a:p>
         </p:txBody>
@@ -6069,7 +6061,7 @@
                 </a:solidFill>
                 <a:latin typeface="Georgia"/>
               </a:rPr>
-              <a:t>CNC-Präzisionsfertigung · 48 Mitarbeiter · 7,2 Mio. EUR Umsatz 2024</a:t>
+              <a:t>Investitionskredit 1,4 Mio. EUR für neue Fertigungsanlage. 3-Jahres-Vergleich liegt vor: Umsatz stabil, EBIT-Marge von 6,8 % auf 4,2 % gefallen, EK-Quote 24 %. GF erklärt Rückgang mit Einmaleffekten. Ihre Aufgabe: 8-Felder-Analyse + Kreditempfehlung.</a:t>
             </a:r>
           </a:p>
         </p:txBody>
@@ -6087,7 +6079,9 @@
   <p:cSld>
     <p:bg>
       <p:bgPr>
-        <a:noFill/>
+        <a:solidFill>
+          <a:srgbClr val="1F2B56"/>
+        </a:solidFill>
         <a:effectLst/>
       </p:bgPr>
     </p:bg>
@@ -6098,12 +6092,6 @@
         <p:nvPr/>
       </p:nvGrpSpPr>
       <p:grpSpPr/>
-      <p:nvGrpSpPr>
-        <p:cNvPr id="23" name="Shape_dup_23_1"/>
-        <p:cNvGrpSpPr/>
-        <p:nvPr/>
-      </p:nvGrpSpPr>
-      <p:grpSpPr/>
       <p:sp>
         <p:nvSpPr>
           <p:cNvPr id="2" name="TextBox 1"/>
@@ -6441,13 +6429,13 @@
       </p:sp>
       <p:sp>
         <p:nvSpPr>
-          <p:cNvPr id="14" name="TextBox 13"/>
+          <p:cNvPr id="11" name="TextBox 10"/>
           <p:cNvSpPr txBox="1"/>
           <p:nvPr/>
         </p:nvSpPr>
         <p:spPr>
           <a:xfrm>
-            <a:off x="609600" y="5213350"/>
+            <a:off x="609600" y="3765550"/>
             <a:ext cx="5207000" cy="444500"/>
           </a:xfrm>
           <a:prstGeom prst="rect">
@@ -6476,13 +6464,13 @@
       </p:sp>
       <p:sp>
         <p:nvSpPr>
-          <p:cNvPr id="15" name="TextBox 14"/>
+          <p:cNvPr id="12" name="TextBox 11"/>
           <p:cNvSpPr txBox="1"/>
           <p:nvPr/>
         </p:nvSpPr>
         <p:spPr>
           <a:xfrm>
-            <a:off x="609600" y="5695950"/>
+            <a:off x="609600" y="4248150"/>
             <a:ext cx="5207000" cy="444500"/>
           </a:xfrm>
           <a:prstGeom prst="rect">
@@ -6511,13 +6499,13 @@
       </p:sp>
       <p:sp>
         <p:nvSpPr>
-          <p:cNvPr id="16" name="TextBox 15"/>
+          <p:cNvPr id="13" name="TextBox 12"/>
           <p:cNvSpPr txBox="1"/>
           <p:nvPr/>
         </p:nvSpPr>
         <p:spPr>
           <a:xfrm>
-            <a:off x="609600" y="6178550"/>
+            <a:off x="609600" y="4730750"/>
             <a:ext cx="5207000" cy="444500"/>
           </a:xfrm>
           <a:prstGeom prst="rect">
@@ -6546,14 +6534,14 @@
       </p:sp>
       <p:sp>
         <p:nvSpPr>
-          <p:cNvPr id="17" name="TextBox 16"/>
+          <p:cNvPr id="14" name="TextBox 13"/>
           <p:cNvSpPr txBox="1"/>
           <p:nvPr/>
         </p:nvSpPr>
         <p:spPr>
           <a:xfrm>
-            <a:off x="6096000" y="2317750"/>
-            <a:ext cx="5232400" cy="444500"/>
+            <a:off x="609600" y="5213350"/>
+            <a:ext cx="5207000" cy="444500"/>
           </a:xfrm>
           <a:prstGeom prst="rect">
             <a:avLst/>
@@ -6574,21 +6562,21 @@
                 </a:solidFill>
                 <a:latin typeface="Courier New"/>
               </a:rPr>
-              <a:t>Macharzina, K. &amp; Wolf, J. (2018). Unternehmensführung (9. Aufl.). Springer Gabler.</a:t>
-            </a:r>
-          </a:p>
-        </p:txBody>
-      </p:sp>
-      <p:sp>
-        <p:nvSpPr>
-          <p:cNvPr id="18" name="TextBox 17"/>
+              <a:t/>
+            </a:r>
+          </a:p>
+        </p:txBody>
+      </p:sp>
+      <p:sp>
+        <p:nvSpPr>
+          <p:cNvPr id="15" name="TextBox 14"/>
           <p:cNvSpPr txBox="1"/>
           <p:nvPr/>
         </p:nvSpPr>
         <p:spPr>
           <a:xfrm>
-            <a:off x="6096000" y="2800350"/>
-            <a:ext cx="5232400" cy="444500"/>
+            <a:off x="609600" y="5695950"/>
+            <a:ext cx="5207000" cy="444500"/>
           </a:xfrm>
           <a:prstGeom prst="rect">
             <a:avLst/>
@@ -6609,21 +6597,21 @@
                 </a:solidFill>
                 <a:latin typeface="Courier New"/>
               </a:rPr>
-              <a:t>Osterwalder, A. &amp; Pigneur, Y. (2010). Business Model Generation. Wiley.</a:t>
-            </a:r>
-          </a:p>
-        </p:txBody>
-      </p:sp>
-      <p:sp>
-        <p:nvSpPr>
-          <p:cNvPr id="19" name="TextBox 18"/>
+              <a:t/>
+            </a:r>
+          </a:p>
+        </p:txBody>
+      </p:sp>
+      <p:sp>
+        <p:nvSpPr>
+          <p:cNvPr id="16" name="TextBox 15"/>
           <p:cNvSpPr txBox="1"/>
           <p:nvPr/>
         </p:nvSpPr>
         <p:spPr>
           <a:xfrm>
-            <a:off x="6096000" y="3282950"/>
-            <a:ext cx="5232400" cy="444500"/>
+            <a:off x="609600" y="6178550"/>
+            <a:ext cx="5207000" cy="444500"/>
           </a:xfrm>
           <a:prstGeom prst="rect">
             <a:avLst/>
@@ -6644,20 +6632,20 @@
                 </a:solidFill>
                 <a:latin typeface="Courier New"/>
               </a:rPr>
-              <a:t>Porter, M. E. (1979). How competitive forces shape strategy. Harvard Business Review, 57(2), 137–145.</a:t>
-            </a:r>
-          </a:p>
-        </p:txBody>
-      </p:sp>
-      <p:sp>
-        <p:nvSpPr>
-          <p:cNvPr id="20" name="TextBox 19"/>
+              <a:t/>
+            </a:r>
+          </a:p>
+        </p:txBody>
+      </p:sp>
+      <p:sp>
+        <p:nvSpPr>
+          <p:cNvPr id="17" name="TextBox 16"/>
           <p:cNvSpPr txBox="1"/>
           <p:nvPr/>
         </p:nvSpPr>
         <p:spPr>
           <a:xfrm>
-            <a:off x="6096000" y="3765550"/>
+            <a:off x="6096000" y="2317750"/>
             <a:ext cx="5232400" cy="444500"/>
           </a:xfrm>
           <a:prstGeom prst="rect">
@@ -6686,13 +6674,13 @@
       </p:sp>
       <p:sp>
         <p:nvSpPr>
-          <p:cNvPr id="21" name="TextBox 20"/>
+          <p:cNvPr id="18" name="TextBox 17"/>
           <p:cNvSpPr txBox="1"/>
           <p:nvPr/>
         </p:nvSpPr>
         <p:spPr>
           <a:xfrm>
-            <a:off x="6096000" y="4248150"/>
+            <a:off x="6096000" y="2800350"/>
             <a:ext cx="5232400" cy="444500"/>
           </a:xfrm>
           <a:prstGeom prst="rect">
@@ -6714,20 +6702,20 @@
                 </a:solidFill>
                 <a:latin typeface="Courier New"/>
               </a:rPr>
-              <a:t>Welge, M. K. &amp; Al-Laham, A. (2012). Strategisches Management (6. Aufl.). Springer Gabler.</a:t>
-            </a:r>
-          </a:p>
-        </p:txBody>
-      </p:sp>
-      <p:sp>
-        <p:nvSpPr>
-          <p:cNvPr id="22" name="TextBox 21"/>
+              <a:t>Macharzina, K. &amp; Wolf, J. (2018). Unternehmensführung (9. Aufl.). Springer Gabler.</a:t>
+            </a:r>
+          </a:p>
+        </p:txBody>
+      </p:sp>
+      <p:sp>
+        <p:nvSpPr>
+          <p:cNvPr id="19" name="TextBox 18"/>
           <p:cNvSpPr txBox="1"/>
           <p:nvPr/>
         </p:nvSpPr>
         <p:spPr>
           <a:xfrm>
-            <a:off x="6096000" y="4730750"/>
+            <a:off x="6096000" y="3282950"/>
             <a:ext cx="5232400" cy="444500"/>
           </a:xfrm>
           <a:prstGeom prst="rect">
@@ -6749,7 +6737,147 @@
                 </a:solidFill>
                 <a:latin typeface="Courier New"/>
               </a:rPr>
+              <a:t>Osterwalder, A. &amp; Pigneur, Y. (2010). Business Model Generation. Wiley.</a:t>
+            </a:r>
+          </a:p>
+        </p:txBody>
+      </p:sp>
+      <p:sp>
+        <p:nvSpPr>
+          <p:cNvPr id="20" name="TextBox 19"/>
+          <p:cNvSpPr txBox="1"/>
+          <p:nvPr/>
+        </p:nvSpPr>
+        <p:spPr>
+          <a:xfrm>
+            <a:off x="6096000" y="3765550"/>
+            <a:ext cx="5232400" cy="444500"/>
+          </a:xfrm>
+          <a:prstGeom prst="rect">
+            <a:avLst/>
+          </a:prstGeom>
+          <a:noFill/>
+        </p:spPr>
+        <p:txBody>
+          <a:bodyPr wrap="square">
+            <a:normAutofit/>
+          </a:bodyPr>
+          <a:lstStyle/>
+          <a:p>
+            <a:pPr algn="l"/>
+            <a:r>
+              <a:rPr sz="1000" b="0" i="0">
+                <a:solidFill>
+                  <a:srgbClr val="F8F8FA"/>
+                </a:solidFill>
+                <a:latin typeface="Courier New"/>
+              </a:rPr>
+              <a:t>Porter, M. E. (1979). How competitive forces shape strategy. Harvard Business Review, 57(2), 137–145.</a:t>
+            </a:r>
+          </a:p>
+        </p:txBody>
+      </p:sp>
+      <p:sp>
+        <p:nvSpPr>
+          <p:cNvPr id="21" name="TextBox 20"/>
+          <p:cNvSpPr txBox="1"/>
+          <p:nvPr/>
+        </p:nvSpPr>
+        <p:spPr>
+          <a:xfrm>
+            <a:off x="6096000" y="4248150"/>
+            <a:ext cx="5232400" cy="444500"/>
+          </a:xfrm>
+          <a:prstGeom prst="rect">
+            <a:avLst/>
+          </a:prstGeom>
+          <a:noFill/>
+        </p:spPr>
+        <p:txBody>
+          <a:bodyPr wrap="square">
+            <a:normAutofit/>
+          </a:bodyPr>
+          <a:lstStyle/>
+          <a:p>
+            <a:pPr algn="l"/>
+            <a:r>
+              <a:rPr sz="1000" b="0" i="0">
+                <a:solidFill>
+                  <a:srgbClr val="F8F8FA"/>
+                </a:solidFill>
+                <a:latin typeface="Courier New"/>
+              </a:rPr>
+              <a:t>Welge, M. K. &amp; Al-Laham, A. (2012). Strategisches Management (6. Aufl.). Springer Gabler.</a:t>
+            </a:r>
+          </a:p>
+        </p:txBody>
+      </p:sp>
+      <p:sp>
+        <p:nvSpPr>
+          <p:cNvPr id="22" name="TextBox 21"/>
+          <p:cNvSpPr txBox="1"/>
+          <p:nvPr/>
+        </p:nvSpPr>
+        <p:spPr>
+          <a:xfrm>
+            <a:off x="6096000" y="4730750"/>
+            <a:ext cx="5232400" cy="444500"/>
+          </a:xfrm>
+          <a:prstGeom prst="rect">
+            <a:avLst/>
+          </a:prstGeom>
+          <a:noFill/>
+        </p:spPr>
+        <p:txBody>
+          <a:bodyPr wrap="square">
+            <a:normAutofit/>
+          </a:bodyPr>
+          <a:lstStyle/>
+          <a:p>
+            <a:pPr algn="l"/>
+            <a:r>
+              <a:rPr sz="1000" b="0" i="0">
+                <a:solidFill>
+                  <a:srgbClr val="F8F8FA"/>
+                </a:solidFill>
+                <a:latin typeface="Courier New"/>
+              </a:rPr>
               <a:t>Wernerfelt, B. (1984). A resource-based view of the firm. Strategic Management Journal, 5(2), 171–180.</a:t>
+            </a:r>
+          </a:p>
+        </p:txBody>
+      </p:sp>
+      <p:sp>
+        <p:nvSpPr>
+          <p:cNvPr id="23" name="TextBox 22"/>
+          <p:cNvSpPr txBox="1"/>
+          <p:nvPr/>
+        </p:nvSpPr>
+        <p:spPr>
+          <a:xfrm>
+            <a:off x="6096000" y="5213350"/>
+            <a:ext cx="5232400" cy="444500"/>
+          </a:xfrm>
+          <a:prstGeom prst="rect">
+            <a:avLst/>
+          </a:prstGeom>
+          <a:noFill/>
+        </p:spPr>
+        <p:txBody>
+          <a:bodyPr wrap="square">
+            <a:normAutofit/>
+          </a:bodyPr>
+          <a:lstStyle/>
+          <a:p>
+            <a:pPr algn="l"/>
+            <a:r>
+              <a:rPr sz="1000" b="0" i="0">
+                <a:solidFill>
+                  <a:srgbClr val="F8F8FA"/>
+                </a:solidFill>
+                <a:latin typeface="Courier New"/>
+              </a:rPr>
+              <a:t/>
             </a:r>
           </a:p>
         </p:txBody>
@@ -6767,7 +6895,9 @@
   <p:cSld>
     <p:bg>
       <p:bgPr>
-        <a:noFill/>
+        <a:solidFill>
+          <a:srgbClr val="F8F8FA"/>
+        </a:solidFill>
         <a:effectLst/>
       </p:bgPr>
     </p:bg>
@@ -6778,12 +6908,6 @@
         <p:nvPr/>
       </p:nvGrpSpPr>
       <p:grpSpPr/>
-      <p:nvGrpSpPr>
-        <p:cNvPr id="11" name="Shape_dup_11_1"/>
-        <p:cNvGrpSpPr/>
-        <p:nvPr/>
-      </p:nvGrpSpPr>
-      <p:grpSpPr/>
       <p:sp>
         <p:nvSpPr>
           <p:cNvPr id="2" name="TextBox 1"/>
@@ -6849,7 +6973,7 @@
                 </a:solidFill>
                 <a:latin typeface="Courier New"/>
               </a:rPr>
-              <a:t>Ende  ·  v0.2</a:t>
+              <a:t>Ende · v0.3</a:t>
             </a:r>
           </a:p>
         </p:txBody>
@@ -6963,7 +7087,7 @@
                 </a:solidFill>
                 <a:latin typeface="Georgia"/>
               </a:rPr>
-              <a:t>Modul «Geschäftsmodell &amp; Strategie bewerten» auf FKB Campus — 6 Lernziele, 120 Minuten, Sparringspartner-Niveauele, Praxisfall und Quellenapparat.</a:t>
+              <a:t>Modul «Kreditentscheidung treffen» auf FKB Campus — 4 Lernziele, Praxisfall und Quellenapparat.</a:t>
             </a:r>
           </a:p>
         </p:txBody>
@@ -7103,7 +7227,7 @@
                 </a:solidFill>
                 <a:latin typeface="Georgia"/>
               </a:rPr>
-              <a:t>M22  ·  Sparringspartner</a:t>
+              <a:t>M21 · Sparringspartner</a:t>
             </a:r>
           </a:p>
         </p:txBody>
@@ -7121,7 +7245,9 @@
   <p:cSld>
     <p:bg>
       <p:bgPr>
-        <a:noFill/>
+        <a:solidFill>
+          <a:srgbClr val="F8F8FA"/>
+        </a:solidFill>
         <a:effectLst/>
       </p:bgPr>
     </p:bg>
@@ -7132,12 +7258,6 @@
         <p:nvPr/>
       </p:nvGrpSpPr>
       <p:grpSpPr/>
-      <p:nvGrpSpPr>
-        <p:cNvPr id="19" name="Shape_dup_19_1"/>
-        <p:cNvGrpSpPr/>
-        <p:nvPr/>
-      </p:nvGrpSpPr>
-      <p:grpSpPr/>
       <p:sp>
         <p:nvSpPr>
           <p:cNvPr id="2" name="TextBox 1"/>
@@ -7429,7 +7549,7 @@
                 </a:solidFill>
                 <a:latin typeface="Georgia"/>
               </a:rPr>
-              <a:t>Strategische Analyseinstrumente (Five Forces, SWOT, Generische Strategien) auf ein KMU-Fallbeispiel anwenden (Bloom 3)</a:t>
+              <a:t>Eine strukturierte Kreditanalyse anhand des 8-Felder-Frameworks selbstständig durchführen und MaRisk-konform dokumentieren (Bloom 3)</a:t>
             </a:r>
           </a:p>
         </p:txBody>
@@ -7542,7 +7662,7 @@
                 </a:solidFill>
                 <a:latin typeface="Georgia"/>
               </a:rPr>
-              <a:t>Stärken, Schwächen und strategische Abhängigkeiten eines Unternehmens analysieren (Bloom 4)</a:t>
+              <a:t>Quantitative und qualitative Risikofaktoren eines Kreditantrags systematisch analysieren und nach Relevanz gewichten (Bloom 4)</a:t>
             </a:r>
           </a:p>
         </p:txBody>
@@ -7655,7 +7775,7 @@
                 </a:solidFill>
                 <a:latin typeface="Georgia"/>
               </a:rPr>
-              <a:t>Qualitative Risikofaktoren (Klumpenrisiken, Nachfolge, Wettbewerbsdruck) von Stabilitätssignalen unterscheiden (Bloom 4)</a:t>
+              <a:t>Eine begründete Kreditempfehlung bewerten, entscheiden und vor dem Kreditausschuss vertreten (Bloom 5)</a:t>
             </a:r>
           </a:p>
         </p:txBody>
@@ -7768,147 +7888,7 @@
                 </a:solidFill>
                 <a:latin typeface="Georgia"/>
               </a:rPr>
-              <a:t>Porters generische Wettbewerbsstrategien identifizieren und das Stuck-in-the-Middle-Risiko eines KMU beurteilen (Bloom 4)</a:t>
-            </a:r>
-          </a:p>
-        </p:txBody>
-      </p:sp>
-      <p:sp>
-        <p:nvSpPr>
-          <p:cNvPr id="20" name="TextBox 16_dup1"/>
-          <p:cNvSpPr txBox="1"/>
-          <p:nvPr/>
-        </p:nvSpPr>
-        <p:spPr>
-          <a:xfrm>
-            <a:off x="4064000" y="3733000"/>
-            <a:ext cx="762000" cy="647700"/>
-          </a:xfrm>
-          <a:prstGeom prst="rect">
-            <a:avLst/>
-          </a:prstGeom>
-          <a:noFill/>
-        </p:spPr>
-        <p:txBody>
-          <a:bodyPr wrap="none">
-            <a:normAutofit/>
-          </a:bodyPr>
-          <a:lstStyle/>
-          <a:p>
-            <a:pPr algn="l"/>
-            <a:r>
-              <a:rPr sz="2400" b="0" i="1">
-                <a:solidFill>
-                  <a:srgbClr val="1F2B56"/>
-                </a:solidFill>
-                <a:latin typeface="Georgia"/>
-              </a:rPr>
-              <a:t>V</a:t>
-            </a:r>
-          </a:p>
-        </p:txBody>
-      </p:sp>
-      <p:sp>
-        <p:nvSpPr>
-          <p:cNvPr id="22" name="TextBox 17_dup1"/>
-          <p:cNvSpPr txBox="1"/>
-          <p:nvPr/>
-        </p:nvSpPr>
-        <p:spPr>
-          <a:xfrm>
-            <a:off x="4953000" y="3745700"/>
-            <a:ext cx="6629400" cy="635000"/>
-          </a:xfrm>
-          <a:prstGeom prst="rect">
-            <a:avLst/>
-          </a:prstGeom>
-          <a:noFill/>
-        </p:spPr>
-        <p:txBody>
-          <a:bodyPr wrap="square">
-            <a:normAutofit/>
-          </a:bodyPr>
-          <a:lstStyle/>
-          <a:p>
-            <a:pPr algn="l"/>
-            <a:r>
-              <a:rPr sz="1400" b="0" i="0">
-                <a:solidFill>
-                  <a:srgbClr val="191D2E"/>
-                </a:solidFill>
-                <a:latin typeface="Georgia"/>
-              </a:rPr>
-              <a:t>Die strategische Position eines Unternehmens hinsichtlich seiner mittelfristigen Kreditwürdigkeit beurteilen (Bloom 5)</a:t>
-            </a:r>
-          </a:p>
-        </p:txBody>
-      </p:sp>
-      <p:sp>
-        <p:nvSpPr>
-          <p:cNvPr id="21" name="TextBox 16_dup2"/>
-          <p:cNvSpPr txBox="1"/>
-          <p:nvPr/>
-        </p:nvSpPr>
-        <p:spPr>
-          <a:xfrm>
-            <a:off x="4064000" y="4430700"/>
-            <a:ext cx="762000" cy="647700"/>
-          </a:xfrm>
-          <a:prstGeom prst="rect">
-            <a:avLst/>
-          </a:prstGeom>
-          <a:noFill/>
-        </p:spPr>
-        <p:txBody>
-          <a:bodyPr wrap="none">
-            <a:normAutofit/>
-          </a:bodyPr>
-          <a:lstStyle/>
-          <a:p>
-            <a:pPr algn="l"/>
-            <a:r>
-              <a:rPr sz="2400" b="0" i="1">
-                <a:solidFill>
-                  <a:srgbClr val="1F2B56"/>
-                </a:solidFill>
-                <a:latin typeface="Georgia"/>
-              </a:rPr>
-              <a:t>VI</a:t>
-            </a:r>
-          </a:p>
-        </p:txBody>
-      </p:sp>
-      <p:sp>
-        <p:nvSpPr>
-          <p:cNvPr id="23" name="TextBox 17_dup2"/>
-          <p:cNvSpPr txBox="1"/>
-          <p:nvPr/>
-        </p:nvSpPr>
-        <p:spPr>
-          <a:xfrm>
-            <a:off x="4953000" y="4443400"/>
-            <a:ext cx="6629400" cy="635000"/>
-          </a:xfrm>
-          <a:prstGeom prst="rect">
-            <a:avLst/>
-          </a:prstGeom>
-          <a:noFill/>
-        </p:spPr>
-        <p:txBody>
-          <a:bodyPr wrap="square">
-            <a:normAutofit/>
-          </a:bodyPr>
-          <a:lstStyle/>
-          <a:p>
-            <a:pPr algn="l"/>
-            <a:r>
-              <a:rPr sz="1400" b="0" i="0">
-                <a:solidFill>
-                  <a:srgbClr val="191D2E"/>
-                </a:solidFill>
-                <a:latin typeface="Georgia"/>
-              </a:rPr>
-              <a:t>Qualitative Befunde strukturiert in einer Kreditvorlage formulieren (Bloom 5)</a:t>
+              <a:t>Kreditvorlagen Dritter kritisch prüfen und Verbesserungspotenziale benennen (Bloom 5)</a:t>
             </a:r>
           </a:p>
         </p:txBody>
@@ -7926,7 +7906,9 @@
   <p:cSld>
     <p:bg>
       <p:bgPr>
-        <a:noFill/>
+        <a:solidFill>
+          <a:srgbClr val="1F2B56"/>
+        </a:solidFill>
         <a:effectLst/>
       </p:bgPr>
     </p:bg>
@@ -7937,12 +7919,6 @@
         <p:nvPr/>
       </p:nvGrpSpPr>
       <p:grpSpPr/>
-      <p:nvGrpSpPr>
-        <p:cNvPr id="8" name="Shape_dup_8_1"/>
-        <p:cNvGrpSpPr/>
-        <p:nvPr/>
-      </p:nvGrpSpPr>
-      <p:grpSpPr/>
       <p:sp>
         <p:nvSpPr>
           <p:cNvPr id="2" name="TextBox 1"/>
@@ -8008,7 +7984,7 @@
                 </a:solidFill>
                 <a:latin typeface="Courier New"/>
               </a:rPr>
-              <a:t>BILANZZAHLEN ZEIGEN DIE VERGANGENHEIT — STRATEGIE ZEIGT DIE ZUKUNFT</a:t>
+              <a:t>EINE GUTE KREDITENTSCHEIDUNG BRAUCHT EIN SYSTEM</a:t>
             </a:r>
           </a:p>
         </p:txBody>
@@ -8113,7 +8089,7 @@
                 </a:solidFill>
                 <a:latin typeface="Georgia"/>
               </a:rPr>
-              <a:t>Warum qualitative Analyse zur Kreditwürdigkeitsbeurteilung gehört</a:t>
+              <a:t>Eine gute Kreditentscheidung braucht ein System</a:t>
             </a:r>
           </a:p>
         </p:txBody>
@@ -8148,7 +8124,7 @@
                 </a:solidFill>
                 <a:latin typeface="Georgia"/>
               </a:rPr>
-              <a:t>Das Drei-Ebenen-Modell als qualitative Analyseplattform</a:t>
+              <a:t>Das 8-Felder-Framework für strukturierte Analyse</a:t>
             </a:r>
           </a:p>
         </p:txBody>
@@ -8166,7 +8142,9 @@
   <p:cSld>
     <p:bg>
       <p:bgPr>
-        <a:noFill/>
+        <a:solidFill>
+          <a:srgbClr val="F8F8FA"/>
+        </a:solidFill>
         <a:effectLst/>
       </p:bgPr>
     </p:bg>
@@ -8177,12 +8155,6 @@
         <p:nvPr/>
       </p:nvGrpSpPr>
       <p:grpSpPr/>
-      <p:nvGrpSpPr>
-        <p:cNvPr id="9" name="Shape_dup_9_1"/>
-        <p:cNvGrpSpPr/>
-        <p:nvPr/>
-      </p:nvGrpSpPr>
-      <p:grpSpPr/>
       <p:sp>
         <p:nvSpPr>
           <p:cNvPr id="2" name="TextBox 1"/>
@@ -8248,7 +8220,7 @@
                 </a:solidFill>
                 <a:latin typeface="Courier New"/>
               </a:rPr>
-              <a:t>I · DAS DREI-EBENEN-MODELL</a:t>
+              <a:t>I · DAS 8-FELDER-FRAMEWORK</a:t>
             </a:r>
           </a:p>
         </p:txBody>
@@ -8361,7 +8333,7 @@
                 </a:solidFill>
                 <a:latin typeface="Georgia"/>
               </a:rPr>
-              <a:t>Drei Ebenen der qualitativen Kreditwürdigkeitsanalyse</a:t>
+              <a:t>Acht Felder — eine vollständige Analyse</a:t>
             </a:r>
           </a:p>
         </p:txBody>
@@ -8446,7 +8418,7 @@
                 </a:solidFill>
                 <a:latin typeface="Georgia"/>
               </a:rPr>
-              <a:t>–  Ebene 1: Markt &amp; Branche — Ist das Marktumfeld des Kunden tragfähig? (Five Forces)</a:t>
+              <a:t>–  Feld 1: Zweck &amp; Verwendung — Wofür wird das Geld gebraucht?</a:t>
             </a:r>
           </a:p>
           <a:p>
@@ -8465,7 +8437,7 @@
                 </a:solidFill>
                 <a:latin typeface="Georgia"/>
               </a:rPr>
-              <a:t>–  Ebene 2: Geschäftsmodell — Wie verdient das Unternehmen sein Geld, wie stabil ist das?</a:t>
+              <a:t>–  Feld 2: Rückzahlungsquelle — Reicht der Cashflow?</a:t>
             </a:r>
           </a:p>
           <a:p>
@@ -8484,7 +8456,7 @@
                 </a:solidFill>
                 <a:latin typeface="Georgia"/>
               </a:rPr>
-              <a:t>–  Ebene 3: Management &amp; Nachfolge — Kann die Führung das Unternehmen durch schwierige Phasen tragen?</a:t>
+              <a:t>–  Feld 3: Kapitalstruktur — Wie stabil ist die Basis?</a:t>
             </a:r>
           </a:p>
           <a:p>
@@ -8503,7 +8475,7 @@
                 </a:solidFill>
                 <a:latin typeface="Georgia"/>
               </a:rPr>
-              <a:t/>
+              <a:t>–  Feld 4: Managementqualität — Wem vertrauen wir?</a:t>
             </a:r>
           </a:p>
           <a:p>
@@ -8522,7 +8494,7 @@
                 </a:solidFill>
                 <a:latin typeface="Georgia"/>
               </a:rPr>
-              <a:t>–  Regulatorischer Anker: § 18 KWG + MaRisk AT 2.2 verpflichten zur qualitativen Analyse ab 750 TEUR</a:t>
+              <a:t>–  Feld 5: Branchenpositionierung — Wie ist die Marktlage?</a:t>
             </a:r>
           </a:p>
           <a:p>
@@ -8541,7 +8513,7 @@
                 </a:solidFill>
                 <a:latin typeface="Georgia"/>
               </a:rPr>
-              <a:t>–  Grant (2016): Nachhaltige Kreditwürdigkeit entsteht wo finanzielle Stabilität und strategische Stärke zusammentreffen</a:t>
+              <a:t>–  Feld 6: Sicherheiten — Was ist verwertbar?</a:t>
             </a:r>
           </a:p>
           <a:p>
@@ -8560,7 +8532,7 @@
                 </a:solidFill>
                 <a:latin typeface="Georgia"/>
               </a:rPr>
-              <a:t>–  Macharzina &amp; Wolf (2018): Qualitative Faktoren stehen gleichwertig neben quantitativen Kennzahlen</a:t>
+              <a:t>–  Feld 7: Konditionen — Risikogerecht bepreist?</a:t>
             </a:r>
           </a:p>
         </p:txBody>
@@ -8578,7 +8550,9 @@
   <p:cSld>
     <p:bg>
       <p:bgPr>
-        <a:noFill/>
+        <a:solidFill>
+          <a:srgbClr val="1F2B56"/>
+        </a:solidFill>
         <a:effectLst/>
       </p:bgPr>
     </p:bg>
@@ -8589,12 +8563,6 @@
         <p:nvPr/>
       </p:nvGrpSpPr>
       <p:grpSpPr/>
-      <p:nvGrpSpPr>
-        <p:cNvPr id="8" name="Shape_dup_8_1"/>
-        <p:cNvGrpSpPr/>
-        <p:nvPr/>
-      </p:nvGrpSpPr>
-      <p:grpSpPr/>
       <p:sp>
         <p:nvSpPr>
           <p:cNvPr id="2" name="TextBox 1"/>
@@ -8660,7 +8628,7 @@
                 </a:solidFill>
                 <a:latin typeface="Courier New"/>
               </a:rPr>
-              <a:t>FÜNF KRÄFTE. EINE STRATEGISCHE ENTSCHEIDUNG. KEIN MITTELWEG.</a:t>
+              <a:t>DIE RÜCKZAHLUNGSQUELLE IST ALLES</a:t>
             </a:r>
           </a:p>
         </p:txBody>
@@ -8765,7 +8733,7 @@
                 </a:solidFill>
                 <a:latin typeface="Georgia"/>
               </a:rPr>
-              <a:t>Porter's Five Forces &amp; das Stuck-in-the-Middle-Problem</a:t>
+              <a:t>Die Rückzahlungsquelle ist alles</a:t>
             </a:r>
           </a:p>
         </p:txBody>
@@ -8800,7 +8768,7 @@
                 </a:solidFill>
                 <a:latin typeface="Georgia"/>
               </a:rPr>
-              <a:t>Wettbewerbsstruktur als Kreditrisiko-Indikator</a:t>
+              <a:t>Feld 2: Cashflow-Analyse in der Praxis</a:t>
             </a:r>
           </a:p>
         </p:txBody>
@@ -8818,7 +8786,9 @@
   <p:cSld>
     <p:bg>
       <p:bgPr>
-        <a:noFill/>
+        <a:solidFill>
+          <a:srgbClr val="F8F8FA"/>
+        </a:solidFill>
         <a:effectLst/>
       </p:bgPr>
     </p:bg>
@@ -8829,12 +8799,6 @@
         <p:nvPr/>
       </p:nvGrpSpPr>
       <p:grpSpPr/>
-      <p:nvGrpSpPr>
-        <p:cNvPr id="12" name="Shape_dup_12_1"/>
-        <p:cNvGrpSpPr/>
-        <p:nvPr/>
-      </p:nvGrpSpPr>
-      <p:grpSpPr/>
       <p:sp>
         <p:nvSpPr>
           <p:cNvPr id="2" name="TextBox 1"/>
@@ -8900,7 +8864,7 @@
                 </a:solidFill>
                 <a:latin typeface="Courier New"/>
               </a:rPr>
-              <a:t>II · FIVE FORCES &amp; GENERISCHE STRATEGIEN</a:t>
+              <a:t>II · DIE RÜCKZAHLUNGSQUELLE IST ALLES</a:t>
             </a:r>
           </a:p>
         </p:txBody>
@@ -9048,7 +9012,7 @@
                 </a:solidFill>
                 <a:latin typeface="Georgia"/>
               </a:rPr>
-              <a:t>Fünf Kräfte + drei Strategien + eine Falle</a:t>
+              <a:t>Sicherheiten sind das letzte Mittel — Cashflow ist die erste Frage</a:t>
             </a:r>
           </a:p>
         </p:txBody>
@@ -9126,7 +9090,7 @@
                 </a:solidFill>
                 <a:latin typeface="Georgia"/>
               </a:rPr>
-              <a:t>Five Forces nach Porter (1979): Was bestimmt ob eine Branche dauerhaft Geld abwirft?</a:t>
+              <a:t>Eine Bank, die primär auf Sicherheiten schaut, wird irgendwann Verwertungsexpertin. Die bessere Frage: Kann dieses Unternehmen den Kredit aus seinem operativen Cashflow zurückzahlen — auch wenn es schlechter läuft als geplant?</a:t>
             </a:r>
           </a:p>
         </p:txBody>
@@ -9196,7 +9160,7 @@
                 </a:solidFill>
                 <a:latin typeface="Georgia"/>
               </a:rPr>
-              <a:t>Stuck in the Middle (Porter, 1980, S. 41): Weder günstig noch differenziert → strukturelle Ertragsschwäche → mittelfristiges Kreditrisiko. Warnsignal: GF kann nicht klar sagen, wofür Kunden mehr zahlen.</a:t>
+              <a:t>KDCG ≥ 1,20 ist der Mindeststandard. Der 'Stresstest': Was passiert, wenn der Umsatz 15 % fällt?</a:t>
             </a:r>
           </a:p>
         </p:txBody>
@@ -9214,7 +9178,9 @@
   <p:cSld>
     <p:bg>
       <p:bgPr>
-        <a:noFill/>
+        <a:solidFill>
+          <a:srgbClr val="1F2B56"/>
+        </a:solidFill>
         <a:effectLst/>
       </p:bgPr>
     </p:bg>
@@ -9225,12 +9191,6 @@
         <p:nvPr/>
       </p:nvGrpSpPr>
       <p:grpSpPr/>
-      <p:nvGrpSpPr>
-        <p:cNvPr id="8" name="Shape_dup_8_1"/>
-        <p:cNvGrpSpPr/>
-        <p:nvPr/>
-      </p:nvGrpSpPr>
-      <p:grpSpPr/>
       <p:sp>
         <p:nvSpPr>
           <p:cNvPr id="2" name="TextBox 1"/>
@@ -9296,7 +9256,7 @@
                 </a:solidFill>
                 <a:latin typeface="Courier New"/>
               </a:rPr>
-              <a:t>VOM FRAMEWORK ZUM KREDITURTEIL</a:t>
+              <a:t>VON DER ANALYSE ZUR ENTSCHEIDUNGSVORLAGE</a:t>
             </a:r>
           </a:p>
         </p:txBody>
@@ -9401,7 +9361,7 @@
                 </a:solidFill>
                 <a:latin typeface="Georgia"/>
               </a:rPr>
-              <a:t>SWOT als Kreditrisikofilter &amp; qualitatives Krediturteil</a:t>
+              <a:t>Von der Analyse zur Entscheidungsvorlage</a:t>
             </a:r>
           </a:p>
         </p:txBody>
@@ -9436,7 +9396,7 @@
                 </a:solidFill>
                 <a:latin typeface="Georgia"/>
               </a:rPr>
-              <a:t>Strategische Risiken sichtbar machen</a:t>
+              <a:t>MaRisk-konform und überzeugend</a:t>
             </a:r>
           </a:p>
         </p:txBody>
@@ -9454,7 +9414,9 @@
   <p:cSld>
     <p:bg>
       <p:bgPr>
-        <a:noFill/>
+        <a:solidFill>
+          <a:srgbClr val="F8F8FA"/>
+        </a:solidFill>
         <a:effectLst/>
       </p:bgPr>
     </p:bg>
@@ -9465,12 +9427,6 @@
         <p:nvPr/>
       </p:nvGrpSpPr>
       <p:grpSpPr/>
-      <p:nvGrpSpPr>
-        <p:cNvPr id="9" name="Shape_dup_9_1"/>
-        <p:cNvGrpSpPr/>
-        <p:nvPr/>
-      </p:nvGrpSpPr>
-      <p:grpSpPr/>
       <p:sp>
         <p:nvSpPr>
           <p:cNvPr id="2" name="TextBox 1"/>
@@ -9536,7 +9492,7 @@
                 </a:solidFill>
                 <a:latin typeface="Courier New"/>
               </a:rPr>
-              <a:t>III · SWOT ALS KREDITRISIKOFILTER</a:t>
+              <a:t>III · VON DER ANALYSE ZUR ENTSCHEIDUNGSVORLAGE</a:t>
             </a:r>
           </a:p>
         </p:txBody>
@@ -9649,7 +9605,7 @@
                 </a:solidFill>
                 <a:latin typeface="Georgia"/>
               </a:rPr>
-              <a:t>SWOT im Kreditkontext — andere Lesart als in der Strategieberatung</a:t>
+              <a:t>Struktur einer Kreditvorlage nach MaRisk BTO 1.1</a:t>
             </a:r>
           </a:p>
         </p:txBody>
@@ -9734,7 +9690,7 @@
                 </a:solidFill>
                 <a:latin typeface="Georgia"/>
               </a:rPr>
-              <a:t>–  Stärken: Stabilisatoren der Rückzahlungsfähigkeit</a:t>
+              <a:t>–  Zusammenfassung: Empfehlung auf einen Blick — am Anfang, nicht am Ende</a:t>
             </a:r>
           </a:p>
           <a:p>
@@ -9753,7 +9709,7 @@
                 </a:solidFill>
                 <a:latin typeface="Georgia"/>
               </a:rPr>
-              <a:t>–  Schwächen: Interne Risiken; bei Kumulation erhöhte Ausfallwahrscheinlichkeit</a:t>
+              <a:t>–  Kreditnehmer: Unternehmen, Eigentümer, Konzernstruktur</a:t>
             </a:r>
           </a:p>
           <a:p>
@@ -9772,7 +9728,7 @@
                 </a:solidFill>
                 <a:latin typeface="Georgia"/>
               </a:rPr>
-              <a:t>–  Chancen: Nur relevant wenn Wachstum finanziert werden soll</a:t>
+              <a:t>–  Kreditwürdigkeitsanalyse: 8 Felder, quantitativ + qualitativ</a:t>
             </a:r>
           </a:p>
           <a:p>
@@ -9791,7 +9747,7 @@
                 </a:solidFill>
                 <a:latin typeface="Georgia"/>
               </a:rPr>
-              <a:t>–  Risiken: Externe Bedrohungen für die künftige Ertragslage</a:t>
+              <a:t>–  Sicherheitenkonzept: Art, Wert, Verwertbarkeit</a:t>
             </a:r>
           </a:p>
           <a:p>
@@ -9810,7 +9766,7 @@
                 </a:solidFill>
                 <a:latin typeface="Georgia"/>
               </a:rPr>
-              <a:t/>
+              <a:t>–  Votum: Bewilligung / Ablehnung / Auflagen — mit Begründung</a:t>
             </a:r>
           </a:p>
         </p:txBody>
@@ -9828,7 +9784,9 @@
   <p:cSld>
     <p:bg>
       <p:bgPr>
-        <a:noFill/>
+        <a:solidFill>
+          <a:srgbClr val="F8F8FA"/>
+        </a:solidFill>
         <a:effectLst/>
       </p:bgPr>
     </p:bg>
@@ -9839,12 +9797,6 @@
         <p:nvPr/>
       </p:nvGrpSpPr>
       <p:grpSpPr/>
-      <p:nvGrpSpPr>
-        <p:cNvPr id="9" name="Shape_dup_9_1"/>
-        <p:cNvGrpSpPr/>
-        <p:nvPr/>
-      </p:nvGrpSpPr>
-      <p:grpSpPr/>
       <p:sp>
         <p:nvSpPr>
           <p:cNvPr id="2" name="TextBox 1"/>
@@ -9910,7 +9862,7 @@
                 </a:solidFill>
                 <a:latin typeface="Courier New"/>
               </a:rPr>
-              <a:t>III · VOM FRAMEWORK ZUM KUNDENGESPRÄCH</a:t>
+              <a:t>III · VON DER ANALYSE ZUR ENTSCHEIDUNGSVORLAGE</a:t>
             </a:r>
           </a:p>
         </p:txBody>
@@ -10023,7 +9975,7 @@
                 </a:solidFill>
                 <a:latin typeface="Georgia"/>
               </a:rPr>
-              <a:t>Frameworks → Unternehmersprache: Kein Jargon im Kundengespräch</a:t>
+              <a:t>Entscheidungspsychologie: Wie der Ausschuss wirklich entscheidet</a:t>
             </a:r>
           </a:p>
         </p:txBody>
@@ -10108,7 +10060,7 @@
                 </a:solidFill>
                 <a:latin typeface="Georgia"/>
               </a:rPr>
-              <a:t>–  Klumpenrisiko: 'Wie wäre das, wenn Ihr größter Kunde wegbrechen würde? Haben Sie das schon durchgespielt?'</a:t>
+              <a:t>–  Rahmen-Effekt: Wie wird das Risiko präsentiert?</a:t>
             </a:r>
           </a:p>
           <a:p>
@@ -10127,7 +10079,7 @@
                 </a:solidFill>
                 <a:latin typeface="Georgia"/>
               </a:rPr>
-              <a:t>–  Stuck in the Middle: 'Wofür zahlen Ihre Kunden gerne mehr als beim günstigsten Wettbewerber?'</a:t>
+              <a:t>–  Verfügbarkeitsheuristik: Letzte Erfahrungen prägen die Einschätzung</a:t>
             </a:r>
           </a:p>
           <a:p>
@@ -10146,7 +10098,7 @@
                 </a:solidFill>
                 <a:latin typeface="Georgia"/>
               </a:rPr>
-              <a:t>–  Nachfolge: 'Haben Sie konkrete Gedanken gemacht, wie das nach Ihnen weitergeht?'</a:t>
+              <a:t>–  Confirmation Bias: Ausschuss sucht Bestätigung der Empfehlung</a:t>
             </a:r>
           </a:p>
           <a:p>
@@ -10165,7 +10117,7 @@
                 </a:solidFill>
                 <a:latin typeface="Georgia"/>
               </a:rPr>
-              <a:t>–  Investitionsstau: 'Was ist Ihre Planung für den Maschinenpark in den nächsten 3–5 Jahren?'</a:t>
+              <a:t>–  Konsequenz: Klare Empfehlung zuerst — dann Begründung</a:t>
             </a:r>
           </a:p>
         </p:txBody>

--- a/public/downloads/praesentation/M22.pptx
+++ b/public/downloads/praesentation/M22.pptx
@@ -3172,7 +3172,7 @@
                 </a:solidFill>
                 <a:latin typeface="Courier New"/>
               </a:rPr>
-              <a:t>M21  ·  v0.3</a:t>
+              <a:t>M22  ·  v0.2</a:t>
             </a:r>
           </a:p>
         </p:txBody>
@@ -3207,7 +3207,7 @@
                 </a:solidFill>
                 <a:latin typeface="Georgia"/>
               </a:rPr>
-              <a:t>Kreditentscheidung treffen</a:t>
+              <a:t>Geschäftsmodell &amp; Strategie bewerten</a:t>
             </a:r>
           </a:p>
         </p:txBody>
@@ -3285,7 +3285,7 @@
                 </a:solidFill>
                 <a:latin typeface="Georgia"/>
               </a:rPr>
-              <a:t>Strukturierte Kreditanalyse und überzeugende Entscheidungsvorlage</a:t>
+              <a:t>Strategische Unternehmensanalyse als Kern der Kreditwürdigkeitsbeurteilung</a:t>
             </a:r>
           </a:p>
         </p:txBody>
@@ -3425,7 +3425,7 @@
                 </a:solidFill>
                 <a:latin typeface="Georgia"/>
               </a:rPr>
-              <a:t>Halbtag (4 Stunden)</a:t>
+              <a:t>120 Minuten</a:t>
             </a:r>
           </a:p>
         </p:txBody>
@@ -5921,7 +5921,7 @@
                 </a:solidFill>
                 <a:latin typeface="Courier New"/>
               </a:rPr>
-              <a:t>III · VON DER ANALYSE ZUR ENTSCHEIDUNGSVORLAGE</a:t>
+              <a:t>III · VOM FRAMEWORK ZUM KREDITURTEIL</a:t>
             </a:r>
           </a:p>
         </p:txBody>
@@ -6026,7 +6026,7 @@
                 </a:solidFill>
                 <a:latin typeface="Georgia"/>
               </a:rPr>
-              <a:t>Metallbau Schnell GmbH, Heilbronn — Kreditentscheidung</a:t>
+              <a:t>Präzisionswerk Haller GmbH, Ravensburg — Betriebsmittelkredit 800 TEUR</a:t>
             </a:r>
           </a:p>
         </p:txBody>
@@ -6061,7 +6061,7 @@
                 </a:solidFill>
                 <a:latin typeface="Georgia"/>
               </a:rPr>
-              <a:t>Investitionskredit 1,4 Mio. EUR für neue Fertigungsanlage. 3-Jahres-Vergleich liegt vor: Umsatz stabil, EBIT-Marge von 6,8 % auf 4,2 % gefallen, EK-Quote 24 %. GF erklärt Rückgang mit Einmaleffekten. Ihre Aufgabe: 8-Felder-Analyse + Kreditempfehlung.</a:t>
+              <a:t>CNC-Präzisionsfertigung · 48 Mitarbeiter · 7,2 Mio. EUR Umsatz 2024</a:t>
             </a:r>
           </a:p>
         </p:txBody>
@@ -6973,7 +6973,7 @@
                 </a:solidFill>
                 <a:latin typeface="Courier New"/>
               </a:rPr>
-              <a:t>Ende · v0.3</a:t>
+              <a:t>Ende · v0.2</a:t>
             </a:r>
           </a:p>
         </p:txBody>
@@ -7087,7 +7087,7 @@
                 </a:solidFill>
                 <a:latin typeface="Georgia"/>
               </a:rPr>
-              <a:t>Modul «Kreditentscheidung treffen» auf FKB Campus — 4 Lernziele, Praxisfall und Quellenapparat.</a:t>
+              <a:t>Modul «Geschäftsmodell &amp; Strategie bewerten» auf FKB Campus — 6 Lernziele, 120 Minuten, Sparringspartner-Niveauele, Praxisfall und Quellenapparat.</a:t>
             </a:r>
           </a:p>
         </p:txBody>
@@ -7227,7 +7227,7 @@
                 </a:solidFill>
                 <a:latin typeface="Georgia"/>
               </a:rPr>
-              <a:t>M21 · Sparringspartner</a:t>
+              <a:t>M22 · Sparringspartner</a:t>
             </a:r>
           </a:p>
         </p:txBody>
@@ -7323,7 +7323,7 @@
                 </a:solidFill>
                 <a:latin typeface="Courier New"/>
               </a:rPr>
-              <a:t>§ 00 — LERNZIELE</a:t>
+              <a:t>LERNZIELE</a:t>
             </a:r>
           </a:p>
         </p:txBody>
@@ -7549,7 +7549,7 @@
                 </a:solidFill>
                 <a:latin typeface="Georgia"/>
               </a:rPr>
-              <a:t>Eine strukturierte Kreditanalyse anhand des 8-Felder-Frameworks selbstständig durchführen und MaRisk-konform dokumentieren (Bloom 3)</a:t>
+              <a:t>Strategische Analyseinstrumente (Five Forces, SWOT, Generische Strategien) auf ein KMU-Fallbeispiel anwenden (Bloom 3)</a:t>
             </a:r>
           </a:p>
         </p:txBody>
@@ -7662,7 +7662,7 @@
                 </a:solidFill>
                 <a:latin typeface="Georgia"/>
               </a:rPr>
-              <a:t>Quantitative und qualitative Risikofaktoren eines Kreditantrags systematisch analysieren und nach Relevanz gewichten (Bloom 4)</a:t>
+              <a:t>Stärken, Schwächen und strategische Abhängigkeiten eines Unternehmens analysieren (Bloom 4)</a:t>
             </a:r>
           </a:p>
         </p:txBody>
@@ -7775,7 +7775,7 @@
                 </a:solidFill>
                 <a:latin typeface="Georgia"/>
               </a:rPr>
-              <a:t>Eine begründete Kreditempfehlung bewerten, entscheiden und vor dem Kreditausschuss vertreten (Bloom 5)</a:t>
+              <a:t>Qualitative Risikofaktoren (Klumpenrisiken, Nachfolge, Wettbewerbsdruck) von Stabilitätssignalen unterscheiden (Bloom 4)</a:t>
             </a:r>
           </a:p>
         </p:txBody>
@@ -7888,7 +7888,147 @@
                 </a:solidFill>
                 <a:latin typeface="Georgia"/>
               </a:rPr>
-              <a:t>Kreditvorlagen Dritter kritisch prüfen und Verbesserungspotenziale benennen (Bloom 5)</a:t>
+              <a:t>Porters generische Wettbewerbsstrategien identifizieren und das Stuck-in-the-Middle-Risiko eines KMU beurteilen (Bloom 4)</a:t>
+            </a:r>
+          </a:p>
+        </p:txBody>
+      </p:sp>
+      <p:sp>
+        <p:nvSpPr>
+          <p:cNvPr id="19" name="LZ_V_n"/>
+          <p:cNvSpPr txBox="1"/>
+          <p:nvPr/>
+        </p:nvSpPr>
+        <p:spPr>
+          <a:xfrm>
+            <a:off x="4064000" y="3721100"/>
+            <a:ext cx="762000" cy="647700"/>
+          </a:xfrm>
+          <a:prstGeom prst="rect">
+            <a:avLst/>
+          </a:prstGeom>
+          <a:noFill/>
+        </p:spPr>
+        <p:txBody>
+          <a:bodyPr wrap="none">
+            <a:normAutofit/>
+          </a:bodyPr>
+          <a:lstStyle/>
+          <a:p>
+            <a:pPr algn="l"/>
+            <a:r>
+              <a:rPr sz="2400" b="0" i="1">
+                <a:solidFill>
+                  <a:srgbClr val="1F2B56"/>
+                </a:solidFill>
+                <a:latin typeface="Georgia"/>
+              </a:rPr>
+              <a:t>V</a:t>
+            </a:r>
+          </a:p>
+        </p:txBody>
+      </p:sp>
+      <p:sp>
+        <p:nvSpPr>
+          <p:cNvPr id="20" name="LZ_V_t"/>
+          <p:cNvSpPr txBox="1"/>
+          <p:nvPr/>
+        </p:nvSpPr>
+        <p:spPr>
+          <a:xfrm>
+            <a:off x="4953000" y="3733800"/>
+            <a:ext cx="6629400" cy="635000"/>
+          </a:xfrm>
+          <a:prstGeom prst="rect">
+            <a:avLst/>
+          </a:prstGeom>
+          <a:noFill/>
+        </p:spPr>
+        <p:txBody>
+          <a:bodyPr wrap="square">
+            <a:normAutofit/>
+          </a:bodyPr>
+          <a:lstStyle/>
+          <a:p>
+            <a:pPr algn="l"/>
+            <a:r>
+              <a:rPr sz="1400" b="0" i="0">
+                <a:solidFill>
+                  <a:srgbClr val="191D2E"/>
+                </a:solidFill>
+                <a:latin typeface="Georgia"/>
+              </a:rPr>
+              <a:t>Die strategische Position eines Unternehmens hinsichtlich seiner mittelfristigen Kreditwürdigkeit beurteilen (Bloom 5)</a:t>
+            </a:r>
+          </a:p>
+        </p:txBody>
+      </p:sp>
+      <p:sp>
+        <p:nvSpPr>
+          <p:cNvPr id="21" name="LZ_VI_n"/>
+          <p:cNvSpPr txBox="1"/>
+          <p:nvPr/>
+        </p:nvSpPr>
+        <p:spPr>
+          <a:xfrm>
+            <a:off x="4064000" y="4406900"/>
+            <a:ext cx="762000" cy="647700"/>
+          </a:xfrm>
+          <a:prstGeom prst="rect">
+            <a:avLst/>
+          </a:prstGeom>
+          <a:noFill/>
+        </p:spPr>
+        <p:txBody>
+          <a:bodyPr wrap="none">
+            <a:normAutofit/>
+          </a:bodyPr>
+          <a:lstStyle/>
+          <a:p>
+            <a:pPr algn="l"/>
+            <a:r>
+              <a:rPr sz="2400" b="0" i="1">
+                <a:solidFill>
+                  <a:srgbClr val="1F2B56"/>
+                </a:solidFill>
+                <a:latin typeface="Georgia"/>
+              </a:rPr>
+              <a:t>VI</a:t>
+            </a:r>
+          </a:p>
+        </p:txBody>
+      </p:sp>
+      <p:sp>
+        <p:nvSpPr>
+          <p:cNvPr id="22" name="LZ_VI_t"/>
+          <p:cNvSpPr txBox="1"/>
+          <p:nvPr/>
+        </p:nvSpPr>
+        <p:spPr>
+          <a:xfrm>
+            <a:off x="4953000" y="4419600"/>
+            <a:ext cx="6629400" cy="635000"/>
+          </a:xfrm>
+          <a:prstGeom prst="rect">
+            <a:avLst/>
+          </a:prstGeom>
+          <a:noFill/>
+        </p:spPr>
+        <p:txBody>
+          <a:bodyPr wrap="square">
+            <a:normAutofit/>
+          </a:bodyPr>
+          <a:lstStyle/>
+          <a:p>
+            <a:pPr algn="l"/>
+            <a:r>
+              <a:rPr sz="1400" b="0" i="0">
+                <a:solidFill>
+                  <a:srgbClr val="191D2E"/>
+                </a:solidFill>
+                <a:latin typeface="Georgia"/>
+              </a:rPr>
+              <a:t>Qualitative Befunde strukturiert in einer Kreditvorlage formulieren (Bloom 5)</a:t>
             </a:r>
           </a:p>
         </p:txBody>
@@ -7984,7 +8124,7 @@
                 </a:solidFill>
                 <a:latin typeface="Courier New"/>
               </a:rPr>
-              <a:t>EINE GUTE KREDITENTSCHEIDUNG BRAUCHT EIN SYSTEM</a:t>
+              <a:t>BILANZZAHLEN ZEIGEN DIE VERGANGENHEIT — STRATEGIE ZEIGT DIE ZUKUNFT</a:t>
             </a:r>
           </a:p>
         </p:txBody>
@@ -8089,7 +8229,7 @@
                 </a:solidFill>
                 <a:latin typeface="Georgia"/>
               </a:rPr>
-              <a:t>Eine gute Kreditentscheidung braucht ein System</a:t>
+              <a:t>Warum qualitative Analyse zur Kreditwürdigkeitsbeurteilung gehört</a:t>
             </a:r>
           </a:p>
         </p:txBody>
@@ -8124,7 +8264,7 @@
                 </a:solidFill>
                 <a:latin typeface="Georgia"/>
               </a:rPr>
-              <a:t>Das 8-Felder-Framework für strukturierte Analyse</a:t>
+              <a:t>Das Drei-Ebenen-Modell als qualitative Analyseplattform</a:t>
             </a:r>
           </a:p>
         </p:txBody>
@@ -8220,7 +8360,7 @@
                 </a:solidFill>
                 <a:latin typeface="Courier New"/>
               </a:rPr>
-              <a:t>I · DAS 8-FELDER-FRAMEWORK</a:t>
+              <a:t>I · DREI-EBENEN-MODELL</a:t>
             </a:r>
           </a:p>
         </p:txBody>
@@ -8333,7 +8473,7 @@
                 </a:solidFill>
                 <a:latin typeface="Georgia"/>
               </a:rPr>
-              <a:t>Acht Felder — eine vollständige Analyse</a:t>
+              <a:t>Drei Ebenen der qualitativen Kreditwürdigkeitsanalyse</a:t>
             </a:r>
           </a:p>
         </p:txBody>
@@ -8418,7 +8558,12 @@
                 </a:solidFill>
                 <a:latin typeface="Georgia"/>
               </a:rPr>
-              <a:t>–  Feld 1: Zweck &amp; Verwendung — Wofür wird das Geld gebraucht?</a:t>
+              <a:t>–  Ebene 1: Markt &amp; Branche — Ist das Marktumfeld des Kunden tragfähig? (Five Forces)
+–  Ebene 2: Geschäftsmodell — Wie verdient das Unternehmen sein Geld, wie stabil ist das?
+–  Ebene 3: Management &amp; Nachfolge — Kann die Führung das Unternehmen durch schwierige Phasen tragen?
+–  Regulatorischer Anker: § 18 KWG + MaRisk AT 2.2 verpflichten zur qualitativen Analyse ab 750 TEUR
+–  Grant (2016): Nachhaltige Kreditwürdigkeit entsteht wo finanzielle Stabilität und strategische Stärke zusammentreffen
+–  Macharzina &amp; Wolf (2018): Qualitative Faktoren stehen gleichwertig neben quantitativen Kennzahlen</a:t>
             </a:r>
           </a:p>
           <a:p>
@@ -8437,7 +8582,7 @@
                 </a:solidFill>
                 <a:latin typeface="Georgia"/>
               </a:rPr>
-              <a:t>–  Feld 2: Rückzahlungsquelle — Reicht der Cashflow?</a:t>
+              <a:t/>
             </a:r>
           </a:p>
           <a:p>
@@ -8456,7 +8601,7 @@
                 </a:solidFill>
                 <a:latin typeface="Georgia"/>
               </a:rPr>
-              <a:t>–  Feld 3: Kapitalstruktur — Wie stabil ist die Basis?</a:t>
+              <a:t/>
             </a:r>
           </a:p>
           <a:p>
@@ -8475,7 +8620,7 @@
                 </a:solidFill>
                 <a:latin typeface="Georgia"/>
               </a:rPr>
-              <a:t>–  Feld 4: Managementqualität — Wem vertrauen wir?</a:t>
+              <a:t/>
             </a:r>
           </a:p>
           <a:p>
@@ -8494,7 +8639,7 @@
                 </a:solidFill>
                 <a:latin typeface="Georgia"/>
               </a:rPr>
-              <a:t>–  Feld 5: Branchenpositionierung — Wie ist die Marktlage?</a:t>
+              <a:t/>
             </a:r>
           </a:p>
           <a:p>
@@ -8513,7 +8658,7 @@
                 </a:solidFill>
                 <a:latin typeface="Georgia"/>
               </a:rPr>
-              <a:t>–  Feld 6: Sicherheiten — Was ist verwertbar?</a:t>
+              <a:t/>
             </a:r>
           </a:p>
           <a:p>
@@ -8532,7 +8677,7 @@
                 </a:solidFill>
                 <a:latin typeface="Georgia"/>
               </a:rPr>
-              <a:t>–  Feld 7: Konditionen — Risikogerecht bepreist?</a:t>
+              <a:t/>
             </a:r>
           </a:p>
         </p:txBody>
@@ -8628,7 +8773,7 @@
                 </a:solidFill>
                 <a:latin typeface="Courier New"/>
               </a:rPr>
-              <a:t>DIE RÜCKZAHLUNGSQUELLE IST ALLES</a:t>
+              <a:t>FÜNF KRÄFTE. EINE STRATEGISCHE ENTSCHEIDUNG. KEIN MITTELWEG.</a:t>
             </a:r>
           </a:p>
         </p:txBody>
@@ -8733,7 +8878,7 @@
                 </a:solidFill>
                 <a:latin typeface="Georgia"/>
               </a:rPr>
-              <a:t>Die Rückzahlungsquelle ist alles</a:t>
+              <a:t>Porter's Five Forces &amp; das Stuck-in-the-Middle-Problem</a:t>
             </a:r>
           </a:p>
         </p:txBody>
@@ -8768,7 +8913,7 @@
                 </a:solidFill>
                 <a:latin typeface="Georgia"/>
               </a:rPr>
-              <a:t>Feld 2: Cashflow-Analyse in der Praxis</a:t>
+              <a:t>Wettbewerbsstruktur als Kreditrisiko-Indikator</a:t>
             </a:r>
           </a:p>
         </p:txBody>
@@ -8864,7 +9009,7 @@
                 </a:solidFill>
                 <a:latin typeface="Courier New"/>
               </a:rPr>
-              <a:t>II · DIE RÜCKZAHLUNGSQUELLE IST ALLES</a:t>
+              <a:t>II · FIVE FORCES &amp; GENERISCHE STRATEGIEN</a:t>
             </a:r>
           </a:p>
         </p:txBody>
@@ -9012,7 +9157,7 @@
                 </a:solidFill>
                 <a:latin typeface="Georgia"/>
               </a:rPr>
-              <a:t>Sicherheiten sind das letzte Mittel — Cashflow ist die erste Frage</a:t>
+              <a:t>Fünf Kräfte + drei Strategien + eine Falle</a:t>
             </a:r>
           </a:p>
         </p:txBody>
@@ -9090,7 +9235,8 @@
                 </a:solidFill>
                 <a:latin typeface="Georgia"/>
               </a:rPr>
-              <a:t>Eine Bank, die primär auf Sicherheiten schaut, wird irgendwann Verwertungsexpertin. Die bessere Frage: Kann dieses Unternehmen den Kredit aus seinem operativen Cashflow zurückzahlen — auch wenn es schlechter läuft als geplant?</a:t>
+              <a:t>Five Forces nach Porter (1979): Was bestimmt ob eine Branche dauerhaft Geld abwirft? → Branchenattraktivität als Kreditrisikoindikator.
+Generische Strategien (Porter, 1980): Kostenführer oder Differenzierer — wer keins von beidem ist, verliert.</a:t>
             </a:r>
           </a:p>
         </p:txBody>
@@ -9160,7 +9306,7 @@
                 </a:solidFill>
                 <a:latin typeface="Georgia"/>
               </a:rPr>
-              <a:t>KDCG ≥ 1,20 ist der Mindeststandard. Der 'Stresstest': Was passiert, wenn der Umsatz 15 % fällt?</a:t>
+              <a:t>Stuck in the Middle (Porter, 1980, S. 41): Weder günstig noch differenziert → strukturelle Ertragsschwäche → mittelfristiges Kreditrisiko. Warnsignal: GF kann nicht klar sagen, wofür Kunden mehr zahlen.</a:t>
             </a:r>
           </a:p>
         </p:txBody>
@@ -9256,7 +9402,7 @@
                 </a:solidFill>
                 <a:latin typeface="Courier New"/>
               </a:rPr>
-              <a:t>VON DER ANALYSE ZUR ENTSCHEIDUNGSVORLAGE</a:t>
+              <a:t>VOM FRAMEWORK ZUM KREDITURTEIL</a:t>
             </a:r>
           </a:p>
         </p:txBody>
@@ -9361,7 +9507,7 @@
                 </a:solidFill>
                 <a:latin typeface="Georgia"/>
               </a:rPr>
-              <a:t>Von der Analyse zur Entscheidungsvorlage</a:t>
+              <a:t>SWOT als Kreditrisikofilter &amp; qualitatives Krediturteil</a:t>
             </a:r>
           </a:p>
         </p:txBody>
@@ -9396,7 +9542,7 @@
                 </a:solidFill>
                 <a:latin typeface="Georgia"/>
               </a:rPr>
-              <a:t>MaRisk-konform und überzeugend</a:t>
+              <a:t>Strategische Risiken sichtbar machen</a:t>
             </a:r>
           </a:p>
         </p:txBody>
@@ -9492,7 +9638,7 @@
                 </a:solidFill>
                 <a:latin typeface="Courier New"/>
               </a:rPr>
-              <a:t>III · VON DER ANALYSE ZUR ENTSCHEIDUNGSVORLAGE</a:t>
+              <a:t>III · SWOT ALS KREDITRISIKOFILTER</a:t>
             </a:r>
           </a:p>
         </p:txBody>
@@ -9605,7 +9751,7 @@
                 </a:solidFill>
                 <a:latin typeface="Georgia"/>
               </a:rPr>
-              <a:t>Struktur einer Kreditvorlage nach MaRisk BTO 1.1</a:t>
+              <a:t>SWOT im Kreditkontext — andere Lesart als in der Strategieberatung</a:t>
             </a:r>
           </a:p>
         </p:txBody>
@@ -9690,7 +9836,10 @@
                 </a:solidFill>
                 <a:latin typeface="Georgia"/>
               </a:rPr>
-              <a:t>–  Zusammenfassung: Empfehlung auf einen Blick — am Anfang, nicht am Ende</a:t>
+              <a:t>–  Stärken: Stabilisatoren der Rückzahlungsfähigkeit
+–  Schwächen: Interne Risiken; bei Kumulation erhöhte Ausfallwahrscheinlichkeit
+–  Chancen: Nur relevant wenn Wachstum finanziert werden soll
+–  Risiken: Externe Bedrohungen für die künftige Ertragslage</a:t>
             </a:r>
           </a:p>
           <a:p>
@@ -9709,7 +9858,7 @@
                 </a:solidFill>
                 <a:latin typeface="Georgia"/>
               </a:rPr>
-              <a:t>–  Kreditnehmer: Unternehmen, Eigentümer, Konzernstruktur</a:t>
+              <a:t/>
             </a:r>
           </a:p>
           <a:p>
@@ -9728,7 +9877,7 @@
                 </a:solidFill>
                 <a:latin typeface="Georgia"/>
               </a:rPr>
-              <a:t>–  Kreditwürdigkeitsanalyse: 8 Felder, quantitativ + qualitativ</a:t>
+              <a:t/>
             </a:r>
           </a:p>
           <a:p>
@@ -9747,7 +9896,7 @@
                 </a:solidFill>
                 <a:latin typeface="Georgia"/>
               </a:rPr>
-              <a:t>–  Sicherheitenkonzept: Art, Wert, Verwertbarkeit</a:t>
+              <a:t/>
             </a:r>
           </a:p>
           <a:p>
@@ -9766,7 +9915,7 @@
                 </a:solidFill>
                 <a:latin typeface="Georgia"/>
               </a:rPr>
-              <a:t>–  Votum: Bewilligung / Ablehnung / Auflagen — mit Begründung</a:t>
+              <a:t/>
             </a:r>
           </a:p>
         </p:txBody>
@@ -9862,7 +10011,7 @@
                 </a:solidFill>
                 <a:latin typeface="Courier New"/>
               </a:rPr>
-              <a:t>III · VON DER ANALYSE ZUR ENTSCHEIDUNGSVORLAGE</a:t>
+              <a:t>III · VOM FRAMEWORK ZUM KUNDENGESPRÄCH</a:t>
             </a:r>
           </a:p>
         </p:txBody>
@@ -9975,7 +10124,7 @@
                 </a:solidFill>
                 <a:latin typeface="Georgia"/>
               </a:rPr>
-              <a:t>Entscheidungspsychologie: Wie der Ausschuss wirklich entscheidet</a:t>
+              <a:t>Frameworks → Unternehmersprache: Kein Jargon im Kundengespräch</a:t>
             </a:r>
           </a:p>
         </p:txBody>
@@ -10060,7 +10209,10 @@
                 </a:solidFill>
                 <a:latin typeface="Georgia"/>
               </a:rPr>
-              <a:t>–  Rahmen-Effekt: Wie wird das Risiko präsentiert?</a:t>
+              <a:t>–  Klumpenrisiko: 'Wie wäre das, wenn Ihr größter Kunde wegbrechen würde? Haben Sie das schon durchgespielt?'
+–  Stuck in the Middle: 'Wofür zahlen Ihre Kunden gerne mehr als beim günstigsten Wettbewerber?'
+–  Nachfolge: 'Haben Sie konkrete Gedanken gemacht, wie das nach Ihnen weitergeht?'
+–  Investitionsstau: 'Was ist Ihre Planung für den Maschinenpark in den nächsten 3–5 Jahren?'</a:t>
             </a:r>
           </a:p>
           <a:p>
@@ -10079,7 +10231,7 @@
                 </a:solidFill>
                 <a:latin typeface="Georgia"/>
               </a:rPr>
-              <a:t>–  Verfügbarkeitsheuristik: Letzte Erfahrungen prägen die Einschätzung</a:t>
+              <a:t/>
             </a:r>
           </a:p>
           <a:p>
@@ -10098,7 +10250,7 @@
                 </a:solidFill>
                 <a:latin typeface="Georgia"/>
               </a:rPr>
-              <a:t>–  Confirmation Bias: Ausschuss sucht Bestätigung der Empfehlung</a:t>
+              <a:t/>
             </a:r>
           </a:p>
           <a:p>
@@ -10117,7 +10269,7 @@
                 </a:solidFill>
                 <a:latin typeface="Georgia"/>
               </a:rPr>
-              <a:t>–  Konsequenz: Klare Empfehlung zuerst — dann Begründung</a:t>
+              <a:t/>
             </a:r>
           </a:p>
         </p:txBody>
